--- a/docs/pptx/auc3/ritu-auc3-linsubhr-egfrdisc-sideeffect.pptx
+++ b/docs/pptx/auc3/ritu-auc3-linsubhr-egfrdisc-sideeffect.pptx
@@ -2443,7 +2443,7 @@
           </p:nvSpPr>
           <p:spPr>
             <a:xfrm>
-              <a:off x="2040316" y="2073503"/>
+              <a:off x="2044638" y="2073503"/>
               <a:ext cx="0" cy="3649639"/>
             </a:xfrm>
             <a:custGeom>
@@ -2486,7 +2486,7 @@
           </p:nvSpPr>
           <p:spPr>
             <a:xfrm>
-              <a:off x="4520982" y="2073503"/>
+              <a:off x="4520586" y="2073503"/>
               <a:ext cx="0" cy="3649639"/>
             </a:xfrm>
             <a:custGeom>
@@ -2529,7 +2529,7 @@
           </p:nvSpPr>
           <p:spPr>
             <a:xfrm>
-              <a:off x="7001648" y="2073503"/>
+              <a:off x="6996534" y="2073503"/>
               <a:ext cx="0" cy="3649639"/>
             </a:xfrm>
             <a:custGeom>
@@ -2787,7 +2787,7 @@
           </p:nvSpPr>
           <p:spPr>
             <a:xfrm>
-              <a:off x="3280649" y="2073503"/>
+              <a:off x="3282612" y="2073503"/>
               <a:ext cx="0" cy="3649639"/>
             </a:xfrm>
             <a:custGeom>
@@ -2830,7 +2830,7 @@
           </p:nvSpPr>
           <p:spPr>
             <a:xfrm>
-              <a:off x="5761315" y="2073503"/>
+              <a:off x="5758560" y="2073503"/>
               <a:ext cx="0" cy="3649639"/>
             </a:xfrm>
             <a:custGeom>
@@ -2873,7 +2873,7 @@
           </p:nvSpPr>
           <p:spPr>
             <a:xfrm>
-              <a:off x="8241981" y="2073503"/>
+              <a:off x="8234508" y="2073503"/>
               <a:ext cx="0" cy="3649639"/>
             </a:xfrm>
             <a:custGeom>
@@ -2917,518 +2917,518 @@
           <p:spPr>
             <a:xfrm>
               <a:off x="1172049" y="2073503"/>
-              <a:ext cx="7090630" cy="3309219"/>
+              <a:ext cx="7090630" cy="3304934"/>
             </a:xfrm>
             <a:custGeom>
               <a:avLst/>
               <a:pathLst>
-                <a:path w="7090630" h="3309219">
+                <a:path w="7090630" h="3304934">
                   <a:moveTo>
-                    <a:pt x="2277187" y="0"/>
+                    <a:pt x="2246276" y="0"/>
                   </a:moveTo>
                   <a:lnTo>
-                    <a:pt x="2291920" y="32339"/>
-                  </a:lnTo>
-                  <a:lnTo>
-                    <a:pt x="2363543" y="182705"/>
-                  </a:lnTo>
-                  <a:lnTo>
-                    <a:pt x="2435165" y="326520"/>
-                  </a:lnTo>
-                  <a:lnTo>
-                    <a:pt x="2506788" y="464070"/>
-                  </a:lnTo>
-                  <a:lnTo>
-                    <a:pt x="2578410" y="595627"/>
-                  </a:lnTo>
-                  <a:lnTo>
-                    <a:pt x="2650033" y="721452"/>
-                  </a:lnTo>
-                  <a:lnTo>
-                    <a:pt x="2721655" y="841796"/>
-                  </a:lnTo>
-                  <a:lnTo>
-                    <a:pt x="2793278" y="956897"/>
-                  </a:lnTo>
-                  <a:lnTo>
-                    <a:pt x="2864901" y="1066983"/>
-                  </a:lnTo>
-                  <a:lnTo>
-                    <a:pt x="2936523" y="1172273"/>
-                  </a:lnTo>
-                  <a:lnTo>
-                    <a:pt x="3008146" y="1272976"/>
-                  </a:lnTo>
-                  <a:lnTo>
-                    <a:pt x="3079768" y="1369292"/>
-                  </a:lnTo>
-                  <a:lnTo>
-                    <a:pt x="3151391" y="1461411"/>
-                  </a:lnTo>
-                  <a:lnTo>
-                    <a:pt x="3223013" y="1549518"/>
-                  </a:lnTo>
-                  <a:lnTo>
-                    <a:pt x="3294636" y="1633785"/>
-                  </a:lnTo>
-                  <a:lnTo>
-                    <a:pt x="3366258" y="1714382"/>
-                  </a:lnTo>
-                  <a:lnTo>
-                    <a:pt x="3437881" y="1791467"/>
-                  </a:lnTo>
-                  <a:lnTo>
-                    <a:pt x="3509503" y="1865194"/>
-                  </a:lnTo>
-                  <a:lnTo>
-                    <a:pt x="3581126" y="1935709"/>
-                  </a:lnTo>
-                  <a:lnTo>
-                    <a:pt x="3652748" y="2003151"/>
-                  </a:lnTo>
-                  <a:lnTo>
-                    <a:pt x="3724371" y="2067656"/>
-                  </a:lnTo>
-                  <a:lnTo>
-                    <a:pt x="3795993" y="2129350"/>
-                  </a:lnTo>
-                  <a:lnTo>
-                    <a:pt x="3867616" y="2188357"/>
-                  </a:lnTo>
-                  <a:lnTo>
-                    <a:pt x="3939238" y="2244792"/>
-                  </a:lnTo>
-                  <a:lnTo>
-                    <a:pt x="4010861" y="2298769"/>
-                  </a:lnTo>
-                  <a:lnTo>
-                    <a:pt x="4082483" y="2350395"/>
-                  </a:lnTo>
-                  <a:lnTo>
-                    <a:pt x="4154106" y="2399771"/>
-                  </a:lnTo>
-                  <a:lnTo>
-                    <a:pt x="4225729" y="2446996"/>
-                  </a:lnTo>
-                  <a:lnTo>
-                    <a:pt x="4297351" y="2492164"/>
-                  </a:lnTo>
-                  <a:lnTo>
-                    <a:pt x="4368974" y="2535364"/>
-                  </a:lnTo>
-                  <a:lnTo>
-                    <a:pt x="4440596" y="2576681"/>
-                  </a:lnTo>
-                  <a:lnTo>
-                    <a:pt x="4512219" y="2616199"/>
-                  </a:lnTo>
-                  <a:lnTo>
-                    <a:pt x="4583841" y="2653995"/>
-                  </a:lnTo>
-                  <a:lnTo>
-                    <a:pt x="4655464" y="2637560"/>
-                  </a:lnTo>
-                  <a:lnTo>
-                    <a:pt x="4727086" y="2620366"/>
-                  </a:lnTo>
-                  <a:lnTo>
-                    <a:pt x="4798709" y="2602822"/>
-                  </a:lnTo>
-                  <a:lnTo>
-                    <a:pt x="4870331" y="2584921"/>
-                  </a:lnTo>
-                  <a:lnTo>
-                    <a:pt x="4941954" y="2566657"/>
-                  </a:lnTo>
-                  <a:lnTo>
-                    <a:pt x="5013576" y="2548021"/>
-                  </a:lnTo>
-                  <a:lnTo>
-                    <a:pt x="5085199" y="2529007"/>
-                  </a:lnTo>
-                  <a:lnTo>
-                    <a:pt x="5156821" y="2509607"/>
-                  </a:lnTo>
-                  <a:lnTo>
-                    <a:pt x="5228444" y="2489812"/>
-                  </a:lnTo>
-                  <a:lnTo>
-                    <a:pt x="5300066" y="2469615"/>
-                  </a:lnTo>
-                  <a:lnTo>
-                    <a:pt x="5371689" y="2449007"/>
-                  </a:lnTo>
-                  <a:lnTo>
-                    <a:pt x="5443311" y="2427981"/>
-                  </a:lnTo>
-                  <a:lnTo>
-                    <a:pt x="5514934" y="2406528"/>
-                  </a:lnTo>
-                  <a:lnTo>
-                    <a:pt x="5586557" y="2384638"/>
-                  </a:lnTo>
-                  <a:lnTo>
-                    <a:pt x="5658179" y="2362304"/>
-                  </a:lnTo>
-                  <a:lnTo>
-                    <a:pt x="5729802" y="2339516"/>
-                  </a:lnTo>
-                  <a:lnTo>
-                    <a:pt x="5801424" y="2316265"/>
-                  </a:lnTo>
-                  <a:lnTo>
-                    <a:pt x="5873047" y="2292542"/>
-                  </a:lnTo>
-                  <a:lnTo>
-                    <a:pt x="5944669" y="2268336"/>
-                  </a:lnTo>
-                  <a:lnTo>
-                    <a:pt x="6016292" y="2243639"/>
-                  </a:lnTo>
-                  <a:lnTo>
-                    <a:pt x="6087914" y="2218440"/>
-                  </a:lnTo>
-                  <a:lnTo>
-                    <a:pt x="6159537" y="2192728"/>
-                  </a:lnTo>
-                  <a:lnTo>
-                    <a:pt x="6231159" y="2166494"/>
-                  </a:lnTo>
-                  <a:lnTo>
-                    <a:pt x="6302782" y="2139727"/>
-                  </a:lnTo>
-                  <a:lnTo>
-                    <a:pt x="6374404" y="2112417"/>
-                  </a:lnTo>
-                  <a:lnTo>
-                    <a:pt x="6446027" y="2084551"/>
-                  </a:lnTo>
-                  <a:lnTo>
-                    <a:pt x="6517649" y="2056119"/>
-                  </a:lnTo>
-                  <a:lnTo>
-                    <a:pt x="6589272" y="2027109"/>
-                  </a:lnTo>
-                  <a:lnTo>
-                    <a:pt x="6660894" y="1997510"/>
-                  </a:lnTo>
-                  <a:lnTo>
-                    <a:pt x="6732517" y="1967309"/>
-                  </a:lnTo>
-                  <a:lnTo>
-                    <a:pt x="6804139" y="1936495"/>
-                  </a:lnTo>
-                  <a:lnTo>
-                    <a:pt x="6875762" y="1905054"/>
-                  </a:lnTo>
-                  <a:lnTo>
-                    <a:pt x="6947385" y="1872975"/>
-                  </a:lnTo>
-                  <a:lnTo>
-                    <a:pt x="7019007" y="1840244"/>
-                  </a:lnTo>
-                  <a:lnTo>
-                    <a:pt x="7090630" y="1806847"/>
-                  </a:lnTo>
-                  <a:lnTo>
-                    <a:pt x="7090630" y="3309219"/>
-                  </a:lnTo>
-                  <a:lnTo>
-                    <a:pt x="7019007" y="3301269"/>
-                  </a:lnTo>
-                  <a:lnTo>
-                    <a:pt x="6947385" y="3292957"/>
-                  </a:lnTo>
-                  <a:lnTo>
-                    <a:pt x="6875762" y="3284266"/>
-                  </a:lnTo>
-                  <a:lnTo>
-                    <a:pt x="6804139" y="3275180"/>
-                  </a:lnTo>
-                  <a:lnTo>
-                    <a:pt x="6732517" y="3265679"/>
-                  </a:lnTo>
-                  <a:lnTo>
-                    <a:pt x="6660894" y="3255746"/>
-                  </a:lnTo>
-                  <a:lnTo>
-                    <a:pt x="6589272" y="3245360"/>
-                  </a:lnTo>
-                  <a:lnTo>
-                    <a:pt x="6517649" y="3234502"/>
-                  </a:lnTo>
-                  <a:lnTo>
-                    <a:pt x="6446027" y="3223148"/>
-                  </a:lnTo>
-                  <a:lnTo>
-                    <a:pt x="6374404" y="3211278"/>
-                  </a:lnTo>
-                  <a:lnTo>
-                    <a:pt x="6302782" y="3198867"/>
-                  </a:lnTo>
-                  <a:lnTo>
-                    <a:pt x="6231159" y="3185890"/>
-                  </a:lnTo>
-                  <a:lnTo>
-                    <a:pt x="6159537" y="3172322"/>
-                  </a:lnTo>
-                  <a:lnTo>
-                    <a:pt x="6087914" y="3158137"/>
-                  </a:lnTo>
-                  <a:lnTo>
-                    <a:pt x="6016292" y="3143305"/>
-                  </a:lnTo>
-                  <a:lnTo>
-                    <a:pt x="5944669" y="3127797"/>
-                  </a:lnTo>
-                  <a:lnTo>
-                    <a:pt x="5873047" y="3111583"/>
-                  </a:lnTo>
-                  <a:lnTo>
-                    <a:pt x="5801424" y="3094631"/>
-                  </a:lnTo>
-                  <a:lnTo>
-                    <a:pt x="5729802" y="3076906"/>
-                  </a:lnTo>
-                  <a:lnTo>
-                    <a:pt x="5658179" y="3058374"/>
-                  </a:lnTo>
-                  <a:lnTo>
-                    <a:pt x="5586557" y="3038998"/>
-                  </a:lnTo>
-                  <a:lnTo>
-                    <a:pt x="5514934" y="3018739"/>
-                  </a:lnTo>
-                  <a:lnTo>
-                    <a:pt x="5443311" y="2997558"/>
-                  </a:lnTo>
-                  <a:lnTo>
-                    <a:pt x="5371689" y="2975411"/>
-                  </a:lnTo>
-                  <a:lnTo>
-                    <a:pt x="5300066" y="2952256"/>
-                  </a:lnTo>
-                  <a:lnTo>
-                    <a:pt x="5228444" y="2928046"/>
-                  </a:lnTo>
-                  <a:lnTo>
-                    <a:pt x="5156821" y="2902733"/>
-                  </a:lnTo>
-                  <a:lnTo>
-                    <a:pt x="5085199" y="2876268"/>
-                  </a:lnTo>
-                  <a:lnTo>
-                    <a:pt x="5013576" y="2848596"/>
-                  </a:lnTo>
-                  <a:lnTo>
-                    <a:pt x="4941954" y="2819665"/>
-                  </a:lnTo>
-                  <a:lnTo>
-                    <a:pt x="4870331" y="2789415"/>
-                  </a:lnTo>
-                  <a:lnTo>
-                    <a:pt x="4798709" y="2757787"/>
-                  </a:lnTo>
-                  <a:lnTo>
-                    <a:pt x="4727086" y="2724719"/>
-                  </a:lnTo>
-                  <a:lnTo>
-                    <a:pt x="4655464" y="2690145"/>
-                  </a:lnTo>
-                  <a:lnTo>
-                    <a:pt x="4583841" y="2654413"/>
-                  </a:lnTo>
-                  <a:lnTo>
-                    <a:pt x="4512219" y="2670929"/>
-                  </a:lnTo>
-                  <a:lnTo>
-                    <a:pt x="4440596" y="2687117"/>
-                  </a:lnTo>
-                  <a:lnTo>
-                    <a:pt x="4368974" y="2702982"/>
-                  </a:lnTo>
-                  <a:lnTo>
-                    <a:pt x="4297351" y="2718532"/>
-                  </a:lnTo>
-                  <a:lnTo>
-                    <a:pt x="4225729" y="2733771"/>
-                  </a:lnTo>
-                  <a:lnTo>
-                    <a:pt x="4154106" y="2748708"/>
-                  </a:lnTo>
-                  <a:lnTo>
-                    <a:pt x="4082483" y="2763346"/>
-                  </a:lnTo>
-                  <a:lnTo>
-                    <a:pt x="4010861" y="2777693"/>
-                  </a:lnTo>
-                  <a:lnTo>
-                    <a:pt x="3939238" y="2791755"/>
-                  </a:lnTo>
-                  <a:lnTo>
-                    <a:pt x="3867616" y="2805536"/>
-                  </a:lnTo>
-                  <a:lnTo>
-                    <a:pt x="3795993" y="2819043"/>
-                  </a:lnTo>
-                  <a:lnTo>
-                    <a:pt x="3724371" y="2832281"/>
-                  </a:lnTo>
-                  <a:lnTo>
-                    <a:pt x="3652748" y="2845255"/>
-                  </a:lnTo>
-                  <a:lnTo>
-                    <a:pt x="3581126" y="2857971"/>
-                  </a:lnTo>
-                  <a:lnTo>
-                    <a:pt x="3509503" y="2870434"/>
-                  </a:lnTo>
-                  <a:lnTo>
-                    <a:pt x="3437881" y="2882648"/>
-                  </a:lnTo>
-                  <a:lnTo>
-                    <a:pt x="3366258" y="2894620"/>
-                  </a:lnTo>
-                  <a:lnTo>
-                    <a:pt x="3294636" y="2906352"/>
-                  </a:lnTo>
-                  <a:lnTo>
-                    <a:pt x="3223013" y="2917852"/>
-                  </a:lnTo>
-                  <a:lnTo>
-                    <a:pt x="3151391" y="2929122"/>
-                  </a:lnTo>
-                  <a:lnTo>
-                    <a:pt x="3079768" y="2940167"/>
-                  </a:lnTo>
-                  <a:lnTo>
-                    <a:pt x="3008146" y="2950993"/>
-                  </a:lnTo>
-                  <a:lnTo>
-                    <a:pt x="2936523" y="2961603"/>
-                  </a:lnTo>
-                  <a:lnTo>
-                    <a:pt x="2864901" y="2972002"/>
-                  </a:lnTo>
-                  <a:lnTo>
-                    <a:pt x="2793278" y="2982194"/>
-                  </a:lnTo>
-                  <a:lnTo>
-                    <a:pt x="2721655" y="2992182"/>
-                  </a:lnTo>
-                  <a:lnTo>
-                    <a:pt x="2650033" y="3001972"/>
-                  </a:lnTo>
-                  <a:lnTo>
-                    <a:pt x="2578410" y="3011567"/>
-                  </a:lnTo>
-                  <a:lnTo>
-                    <a:pt x="2506788" y="3020971"/>
-                  </a:lnTo>
-                  <a:lnTo>
-                    <a:pt x="2435165" y="3030187"/>
-                  </a:lnTo>
-                  <a:lnTo>
-                    <a:pt x="2363543" y="3039220"/>
-                  </a:lnTo>
-                  <a:lnTo>
-                    <a:pt x="2291920" y="3048073"/>
-                  </a:lnTo>
-                  <a:lnTo>
-                    <a:pt x="2220298" y="3056750"/>
-                  </a:lnTo>
-                  <a:lnTo>
-                    <a:pt x="2148675" y="3065253"/>
-                  </a:lnTo>
-                  <a:lnTo>
-                    <a:pt x="2077053" y="3073588"/>
-                  </a:lnTo>
-                  <a:lnTo>
-                    <a:pt x="2005430" y="3081757"/>
-                  </a:lnTo>
-                  <a:lnTo>
-                    <a:pt x="1933808" y="3089762"/>
-                  </a:lnTo>
-                  <a:lnTo>
-                    <a:pt x="1862185" y="3097609"/>
-                  </a:lnTo>
-                  <a:lnTo>
-                    <a:pt x="1790563" y="3105299"/>
-                  </a:lnTo>
-                  <a:lnTo>
-                    <a:pt x="1718940" y="3112836"/>
-                  </a:lnTo>
-                  <a:lnTo>
-                    <a:pt x="1647318" y="3120223"/>
-                  </a:lnTo>
-                  <a:lnTo>
-                    <a:pt x="1575695" y="3127463"/>
-                  </a:lnTo>
-                  <a:lnTo>
-                    <a:pt x="1504073" y="3134558"/>
-                  </a:lnTo>
-                  <a:lnTo>
-                    <a:pt x="1432450" y="3141512"/>
-                  </a:lnTo>
-                  <a:lnTo>
-                    <a:pt x="1360827" y="3148328"/>
-                  </a:lnTo>
-                  <a:lnTo>
-                    <a:pt x="1289205" y="3155008"/>
-                  </a:lnTo>
-                  <a:lnTo>
-                    <a:pt x="1217582" y="3161555"/>
-                  </a:lnTo>
-                  <a:lnTo>
-                    <a:pt x="1145960" y="3167972"/>
-                  </a:lnTo>
-                  <a:lnTo>
-                    <a:pt x="1074337" y="3174261"/>
-                  </a:lnTo>
-                  <a:lnTo>
-                    <a:pt x="1002715" y="3180424"/>
-                  </a:lnTo>
-                  <a:lnTo>
-                    <a:pt x="931092" y="3186465"/>
-                  </a:lnTo>
-                  <a:lnTo>
-                    <a:pt x="859470" y="3192386"/>
-                  </a:lnTo>
-                  <a:lnTo>
-                    <a:pt x="787847" y="3198188"/>
-                  </a:lnTo>
-                  <a:lnTo>
-                    <a:pt x="716225" y="3203875"/>
-                  </a:lnTo>
-                  <a:lnTo>
-                    <a:pt x="644602" y="3209449"/>
-                  </a:lnTo>
-                  <a:lnTo>
-                    <a:pt x="572980" y="3214912"/>
-                  </a:lnTo>
-                  <a:lnTo>
-                    <a:pt x="501357" y="3220266"/>
-                  </a:lnTo>
-                  <a:lnTo>
-                    <a:pt x="429735" y="3225513"/>
-                  </a:lnTo>
-                  <a:lnTo>
-                    <a:pt x="358112" y="3230656"/>
-                  </a:lnTo>
-                  <a:lnTo>
-                    <a:pt x="286490" y="3235697"/>
-                  </a:lnTo>
-                  <a:lnTo>
-                    <a:pt x="214867" y="3240637"/>
-                  </a:lnTo>
-                  <a:lnTo>
-                    <a:pt x="143245" y="3245478"/>
-                  </a:lnTo>
-                  <a:lnTo>
-                    <a:pt x="71622" y="3250223"/>
-                  </a:lnTo>
-                  <a:lnTo>
-                    <a:pt x="0" y="3254874"/>
+                    <a:pt x="2291920" y="96867"/>
+                  </a:lnTo>
+                  <a:lnTo>
+                    <a:pt x="2363543" y="242336"/>
+                  </a:lnTo>
+                  <a:lnTo>
+                    <a:pt x="2435165" y="381557"/>
+                  </a:lnTo>
+                  <a:lnTo>
+                    <a:pt x="2506788" y="514798"/>
+                  </a:lnTo>
+                  <a:lnTo>
+                    <a:pt x="2578410" y="642317"/>
+                  </a:lnTo>
+                  <a:lnTo>
+                    <a:pt x="2650033" y="764358"/>
+                  </a:lnTo>
+                  <a:lnTo>
+                    <a:pt x="2721655" y="881158"/>
+                  </a:lnTo>
+                  <a:lnTo>
+                    <a:pt x="2793278" y="992941"/>
+                  </a:lnTo>
+                  <a:lnTo>
+                    <a:pt x="2864901" y="1099923"/>
+                  </a:lnTo>
+                  <a:lnTo>
+                    <a:pt x="2936523" y="1202310"/>
+                  </a:lnTo>
+                  <a:lnTo>
+                    <a:pt x="3008146" y="1300299"/>
+                  </a:lnTo>
+                  <a:lnTo>
+                    <a:pt x="3079768" y="1394080"/>
+                  </a:lnTo>
+                  <a:lnTo>
+                    <a:pt x="3151391" y="1483833"/>
+                  </a:lnTo>
+                  <a:lnTo>
+                    <a:pt x="3223013" y="1569730"/>
+                  </a:lnTo>
+                  <a:lnTo>
+                    <a:pt x="3294636" y="1651939"/>
+                  </a:lnTo>
+                  <a:lnTo>
+                    <a:pt x="3366258" y="1730616"/>
+                  </a:lnTo>
+                  <a:lnTo>
+                    <a:pt x="3437881" y="1805915"/>
+                  </a:lnTo>
+                  <a:lnTo>
+                    <a:pt x="3509503" y="1877979"/>
+                  </a:lnTo>
+                  <a:lnTo>
+                    <a:pt x="3581126" y="1946948"/>
+                  </a:lnTo>
+                  <a:lnTo>
+                    <a:pt x="3652748" y="2012954"/>
+                  </a:lnTo>
+                  <a:lnTo>
+                    <a:pt x="3724371" y="2076126"/>
+                  </a:lnTo>
+                  <a:lnTo>
+                    <a:pt x="3795993" y="2136584"/>
+                  </a:lnTo>
+                  <a:lnTo>
+                    <a:pt x="3867616" y="2194446"/>
+                  </a:lnTo>
+                  <a:lnTo>
+                    <a:pt x="3939238" y="2249822"/>
+                  </a:lnTo>
+                  <a:lnTo>
+                    <a:pt x="4010861" y="2302820"/>
+                  </a:lnTo>
+                  <a:lnTo>
+                    <a:pt x="4082483" y="2353542"/>
+                  </a:lnTo>
+                  <a:lnTo>
+                    <a:pt x="4154106" y="2402085"/>
+                  </a:lnTo>
+                  <a:lnTo>
+                    <a:pt x="4225729" y="2448543"/>
+                  </a:lnTo>
+                  <a:lnTo>
+                    <a:pt x="4297351" y="2493006"/>
+                  </a:lnTo>
+                  <a:lnTo>
+                    <a:pt x="4368974" y="2535559"/>
+                  </a:lnTo>
+                  <a:lnTo>
+                    <a:pt x="4440596" y="2576284"/>
+                  </a:lnTo>
+                  <a:lnTo>
+                    <a:pt x="4512219" y="2615260"/>
+                  </a:lnTo>
+                  <a:lnTo>
+                    <a:pt x="4583841" y="2652563"/>
+                  </a:lnTo>
+                  <a:lnTo>
+                    <a:pt x="4655464" y="2637252"/>
+                  </a:lnTo>
+                  <a:lnTo>
+                    <a:pt x="4727086" y="2619000"/>
+                  </a:lnTo>
+                  <a:lnTo>
+                    <a:pt x="4798709" y="2600356"/>
+                  </a:lnTo>
+                  <a:lnTo>
+                    <a:pt x="4870331" y="2581309"/>
+                  </a:lnTo>
+                  <a:lnTo>
+                    <a:pt x="4941954" y="2561852"/>
+                  </a:lnTo>
+                  <a:lnTo>
+                    <a:pt x="5013576" y="2541975"/>
+                  </a:lnTo>
+                  <a:lnTo>
+                    <a:pt x="5085199" y="2521669"/>
+                  </a:lnTo>
+                  <a:lnTo>
+                    <a:pt x="5156821" y="2500926"/>
+                  </a:lnTo>
+                  <a:lnTo>
+                    <a:pt x="5228444" y="2479736"/>
+                  </a:lnTo>
+                  <a:lnTo>
+                    <a:pt x="5300066" y="2458088"/>
+                  </a:lnTo>
+                  <a:lnTo>
+                    <a:pt x="5371689" y="2435974"/>
+                  </a:lnTo>
+                  <a:lnTo>
+                    <a:pt x="5443311" y="2413383"/>
+                  </a:lnTo>
+                  <a:lnTo>
+                    <a:pt x="5514934" y="2390305"/>
+                  </a:lnTo>
+                  <a:lnTo>
+                    <a:pt x="5586557" y="2366730"/>
+                  </a:lnTo>
+                  <a:lnTo>
+                    <a:pt x="5658179" y="2342646"/>
+                  </a:lnTo>
+                  <a:lnTo>
+                    <a:pt x="5729802" y="2318043"/>
+                  </a:lnTo>
+                  <a:lnTo>
+                    <a:pt x="5801424" y="2292909"/>
+                  </a:lnTo>
+                  <a:lnTo>
+                    <a:pt x="5873047" y="2267234"/>
+                  </a:lnTo>
+                  <a:lnTo>
+                    <a:pt x="5944669" y="2241005"/>
+                  </a:lnTo>
+                  <a:lnTo>
+                    <a:pt x="6016292" y="2214210"/>
+                  </a:lnTo>
+                  <a:lnTo>
+                    <a:pt x="6087914" y="2186838"/>
+                  </a:lnTo>
+                  <a:lnTo>
+                    <a:pt x="6159537" y="2158875"/>
+                  </a:lnTo>
+                  <a:lnTo>
+                    <a:pt x="6231159" y="2130310"/>
+                  </a:lnTo>
+                  <a:lnTo>
+                    <a:pt x="6302782" y="2101129"/>
+                  </a:lnTo>
+                  <a:lnTo>
+                    <a:pt x="6374404" y="2071318"/>
+                  </a:lnTo>
+                  <a:lnTo>
+                    <a:pt x="6446027" y="2040865"/>
+                  </a:lnTo>
+                  <a:lnTo>
+                    <a:pt x="6517649" y="2009755"/>
+                  </a:lnTo>
+                  <a:lnTo>
+                    <a:pt x="6589272" y="1977975"/>
+                  </a:lnTo>
+                  <a:lnTo>
+                    <a:pt x="6660894" y="1945509"/>
+                  </a:lnTo>
+                  <a:lnTo>
+                    <a:pt x="6732517" y="1912343"/>
+                  </a:lnTo>
+                  <a:lnTo>
+                    <a:pt x="6804139" y="1878462"/>
+                  </a:lnTo>
+                  <a:lnTo>
+                    <a:pt x="6875762" y="1843851"/>
+                  </a:lnTo>
+                  <a:lnTo>
+                    <a:pt x="6947385" y="1808493"/>
+                  </a:lnTo>
+                  <a:lnTo>
+                    <a:pt x="7019007" y="1772374"/>
+                  </a:lnTo>
+                  <a:lnTo>
+                    <a:pt x="7090630" y="1735475"/>
+                  </a:lnTo>
+                  <a:lnTo>
+                    <a:pt x="7090630" y="3304934"/>
+                  </a:lnTo>
+                  <a:lnTo>
+                    <a:pt x="7019007" y="3296909"/>
+                  </a:lnTo>
+                  <a:lnTo>
+                    <a:pt x="6947385" y="3288524"/>
+                  </a:lnTo>
+                  <a:lnTo>
+                    <a:pt x="6875762" y="3279763"/>
+                  </a:lnTo>
+                  <a:lnTo>
+                    <a:pt x="6804139" y="3270609"/>
+                  </a:lnTo>
+                  <a:lnTo>
+                    <a:pt x="6732517" y="3261044"/>
+                  </a:lnTo>
+                  <a:lnTo>
+                    <a:pt x="6660894" y="3251049"/>
+                  </a:lnTo>
+                  <a:lnTo>
+                    <a:pt x="6589272" y="3240606"/>
+                  </a:lnTo>
+                  <a:lnTo>
+                    <a:pt x="6517649" y="3229694"/>
+                  </a:lnTo>
+                  <a:lnTo>
+                    <a:pt x="6446027" y="3218293"/>
+                  </a:lnTo>
+                  <a:lnTo>
+                    <a:pt x="6374404" y="3206380"/>
+                  </a:lnTo>
+                  <a:lnTo>
+                    <a:pt x="6302782" y="3193932"/>
+                  </a:lnTo>
+                  <a:lnTo>
+                    <a:pt x="6231159" y="3180926"/>
+                  </a:lnTo>
+                  <a:lnTo>
+                    <a:pt x="6159537" y="3167335"/>
+                  </a:lnTo>
+                  <a:lnTo>
+                    <a:pt x="6087914" y="3153135"/>
+                  </a:lnTo>
+                  <a:lnTo>
+                    <a:pt x="6016292" y="3138298"/>
+                  </a:lnTo>
+                  <a:lnTo>
+                    <a:pt x="5944669" y="3122795"/>
+                  </a:lnTo>
+                  <a:lnTo>
+                    <a:pt x="5873047" y="3106596"/>
+                  </a:lnTo>
+                  <a:lnTo>
+                    <a:pt x="5801424" y="3089670"/>
+                  </a:lnTo>
+                  <a:lnTo>
+                    <a:pt x="5729802" y="3071985"/>
+                  </a:lnTo>
+                  <a:lnTo>
+                    <a:pt x="5658179" y="3053506"/>
+                  </a:lnTo>
+                  <a:lnTo>
+                    <a:pt x="5586557" y="3034197"/>
+                  </a:lnTo>
+                  <a:lnTo>
+                    <a:pt x="5514934" y="3014022"/>
+                  </a:lnTo>
+                  <a:lnTo>
+                    <a:pt x="5443311" y="2992942"/>
+                  </a:lnTo>
+                  <a:lnTo>
+                    <a:pt x="5371689" y="2970915"/>
+                  </a:lnTo>
+                  <a:lnTo>
+                    <a:pt x="5300066" y="2947900"/>
+                  </a:lnTo>
+                  <a:lnTo>
+                    <a:pt x="5228444" y="2923853"/>
+                  </a:lnTo>
+                  <a:lnTo>
+                    <a:pt x="5156821" y="2898725"/>
+                  </a:lnTo>
+                  <a:lnTo>
+                    <a:pt x="5085199" y="2872471"/>
+                  </a:lnTo>
+                  <a:lnTo>
+                    <a:pt x="5013576" y="2845038"/>
+                  </a:lnTo>
+                  <a:lnTo>
+                    <a:pt x="4941954" y="2816374"/>
+                  </a:lnTo>
+                  <a:lnTo>
+                    <a:pt x="4870331" y="2786423"/>
+                  </a:lnTo>
+                  <a:lnTo>
+                    <a:pt x="4798709" y="2755128"/>
+                  </a:lnTo>
+                  <a:lnTo>
+                    <a:pt x="4727086" y="2722429"/>
+                  </a:lnTo>
+                  <a:lnTo>
+                    <a:pt x="4655464" y="2688263"/>
+                  </a:lnTo>
+                  <a:lnTo>
+                    <a:pt x="4583841" y="2655117"/>
+                  </a:lnTo>
+                  <a:lnTo>
+                    <a:pt x="4512219" y="2672606"/>
+                  </a:lnTo>
+                  <a:lnTo>
+                    <a:pt x="4440596" y="2689726"/>
+                  </a:lnTo>
+                  <a:lnTo>
+                    <a:pt x="4368974" y="2706485"/>
+                  </a:lnTo>
+                  <a:lnTo>
+                    <a:pt x="4297351" y="2722889"/>
+                  </a:lnTo>
+                  <a:lnTo>
+                    <a:pt x="4225729" y="2738948"/>
+                  </a:lnTo>
+                  <a:lnTo>
+                    <a:pt x="4154106" y="2754667"/>
+                  </a:lnTo>
+                  <a:lnTo>
+                    <a:pt x="4082483" y="2770055"/>
+                  </a:lnTo>
+                  <a:lnTo>
+                    <a:pt x="4010861" y="2785118"/>
+                  </a:lnTo>
+                  <a:lnTo>
+                    <a:pt x="3939238" y="2799863"/>
+                  </a:lnTo>
+                  <a:lnTo>
+                    <a:pt x="3867616" y="2814297"/>
+                  </a:lnTo>
+                  <a:lnTo>
+                    <a:pt x="3795993" y="2828427"/>
+                  </a:lnTo>
+                  <a:lnTo>
+                    <a:pt x="3724371" y="2842258"/>
+                  </a:lnTo>
+                  <a:lnTo>
+                    <a:pt x="3652748" y="2855797"/>
+                  </a:lnTo>
+                  <a:lnTo>
+                    <a:pt x="3581126" y="2869050"/>
+                  </a:lnTo>
+                  <a:lnTo>
+                    <a:pt x="3509503" y="2882024"/>
+                  </a:lnTo>
+                  <a:lnTo>
+                    <a:pt x="3437881" y="2894724"/>
+                  </a:lnTo>
+                  <a:lnTo>
+                    <a:pt x="3366258" y="2907155"/>
+                  </a:lnTo>
+                  <a:lnTo>
+                    <a:pt x="3294636" y="2919325"/>
+                  </a:lnTo>
+                  <a:lnTo>
+                    <a:pt x="3223013" y="2931237"/>
+                  </a:lnTo>
+                  <a:lnTo>
+                    <a:pt x="3151391" y="2942899"/>
+                  </a:lnTo>
+                  <a:lnTo>
+                    <a:pt x="3079768" y="2954314"/>
+                  </a:lnTo>
+                  <a:lnTo>
+                    <a:pt x="3008146" y="2965488"/>
+                  </a:lnTo>
+                  <a:lnTo>
+                    <a:pt x="2936523" y="2976426"/>
+                  </a:lnTo>
+                  <a:lnTo>
+                    <a:pt x="2864901" y="2987133"/>
+                  </a:lnTo>
+                  <a:lnTo>
+                    <a:pt x="2793278" y="2997615"/>
+                  </a:lnTo>
+                  <a:lnTo>
+                    <a:pt x="2721655" y="3007875"/>
+                  </a:lnTo>
+                  <a:lnTo>
+                    <a:pt x="2650033" y="3017919"/>
+                  </a:lnTo>
+                  <a:lnTo>
+                    <a:pt x="2578410" y="3027750"/>
+                  </a:lnTo>
+                  <a:lnTo>
+                    <a:pt x="2506788" y="3037375"/>
+                  </a:lnTo>
+                  <a:lnTo>
+                    <a:pt x="2435165" y="3046796"/>
+                  </a:lnTo>
+                  <a:lnTo>
+                    <a:pt x="2363543" y="3056018"/>
+                  </a:lnTo>
+                  <a:lnTo>
+                    <a:pt x="2291920" y="3065045"/>
+                  </a:lnTo>
+                  <a:lnTo>
+                    <a:pt x="2220298" y="3073882"/>
+                  </a:lnTo>
+                  <a:lnTo>
+                    <a:pt x="2148675" y="3082533"/>
+                  </a:lnTo>
+                  <a:lnTo>
+                    <a:pt x="2077053" y="3091001"/>
+                  </a:lnTo>
+                  <a:lnTo>
+                    <a:pt x="2005430" y="3099290"/>
+                  </a:lnTo>
+                  <a:lnTo>
+                    <a:pt x="1933808" y="3107404"/>
+                  </a:lnTo>
+                  <a:lnTo>
+                    <a:pt x="1862185" y="3115347"/>
+                  </a:lnTo>
+                  <a:lnTo>
+                    <a:pt x="1790563" y="3123123"/>
+                  </a:lnTo>
+                  <a:lnTo>
+                    <a:pt x="1718940" y="3130734"/>
+                  </a:lnTo>
+                  <a:lnTo>
+                    <a:pt x="1647318" y="3138185"/>
+                  </a:lnTo>
+                  <a:lnTo>
+                    <a:pt x="1575695" y="3145478"/>
+                  </a:lnTo>
+                  <a:lnTo>
+                    <a:pt x="1504073" y="3152617"/>
+                  </a:lnTo>
+                  <a:lnTo>
+                    <a:pt x="1432450" y="3159606"/>
+                  </a:lnTo>
+                  <a:lnTo>
+                    <a:pt x="1360827" y="3166447"/>
+                  </a:lnTo>
+                  <a:lnTo>
+                    <a:pt x="1289205" y="3173144"/>
+                  </a:lnTo>
+                  <a:lnTo>
+                    <a:pt x="1217582" y="3179700"/>
+                  </a:lnTo>
+                  <a:lnTo>
+                    <a:pt x="1145960" y="3186117"/>
+                  </a:lnTo>
+                  <a:lnTo>
+                    <a:pt x="1074337" y="3192399"/>
+                  </a:lnTo>
+                  <a:lnTo>
+                    <a:pt x="1002715" y="3198548"/>
+                  </a:lnTo>
+                  <a:lnTo>
+                    <a:pt x="931092" y="3204567"/>
+                  </a:lnTo>
+                  <a:lnTo>
+                    <a:pt x="859470" y="3210459"/>
+                  </a:lnTo>
+                  <a:lnTo>
+                    <a:pt x="787847" y="3216227"/>
+                  </a:lnTo>
+                  <a:lnTo>
+                    <a:pt x="716225" y="3221874"/>
+                  </a:lnTo>
+                  <a:lnTo>
+                    <a:pt x="644602" y="3227401"/>
+                  </a:lnTo>
+                  <a:lnTo>
+                    <a:pt x="572980" y="3232811"/>
+                  </a:lnTo>
+                  <a:lnTo>
+                    <a:pt x="501357" y="3238107"/>
+                  </a:lnTo>
+                  <a:lnTo>
+                    <a:pt x="429735" y="3243292"/>
+                  </a:lnTo>
+                  <a:lnTo>
+                    <a:pt x="358112" y="3248367"/>
+                  </a:lnTo>
+                  <a:lnTo>
+                    <a:pt x="286490" y="3253334"/>
+                  </a:lnTo>
+                  <a:lnTo>
+                    <a:pt x="214867" y="3258197"/>
+                  </a:lnTo>
+                  <a:lnTo>
+                    <a:pt x="143245" y="3262958"/>
+                  </a:lnTo>
+                  <a:lnTo>
+                    <a:pt x="71622" y="3267618"/>
+                  </a:lnTo>
+                  <a:lnTo>
+                    <a:pt x="0" y="3272179"/>
                   </a:lnTo>
                   <a:close/>
                 </a:path>
@@ -3454,219 +3454,219 @@
           </p:nvSpPr>
           <p:spPr>
             <a:xfrm>
-              <a:off x="3449237" y="2073503"/>
-              <a:ext cx="4813442" cy="2653995"/>
+              <a:off x="3418325" y="2073503"/>
+              <a:ext cx="4844353" cy="2652563"/>
             </a:xfrm>
             <a:custGeom>
               <a:avLst/>
               <a:pathLst>
-                <a:path w="4813442" h="2653995">
+                <a:path w="4844353" h="2652563">
                   <a:moveTo>
                     <a:pt x="0" y="0"/>
                   </a:moveTo>
                   <a:lnTo>
-                    <a:pt x="14733" y="32339"/>
-                  </a:lnTo>
-                  <a:lnTo>
-                    <a:pt x="86355" y="182705"/>
-                  </a:lnTo>
-                  <a:lnTo>
-                    <a:pt x="157978" y="326520"/>
-                  </a:lnTo>
-                  <a:lnTo>
-                    <a:pt x="229600" y="464070"/>
-                  </a:lnTo>
-                  <a:lnTo>
-                    <a:pt x="301223" y="595627"/>
-                  </a:lnTo>
-                  <a:lnTo>
-                    <a:pt x="372845" y="721452"/>
-                  </a:lnTo>
-                  <a:lnTo>
-                    <a:pt x="444468" y="841796"/>
-                  </a:lnTo>
-                  <a:lnTo>
-                    <a:pt x="516090" y="956897"/>
-                  </a:lnTo>
-                  <a:lnTo>
-                    <a:pt x="587713" y="1066983"/>
-                  </a:lnTo>
-                  <a:lnTo>
-                    <a:pt x="659335" y="1172273"/>
-                  </a:lnTo>
-                  <a:lnTo>
-                    <a:pt x="730958" y="1272976"/>
-                  </a:lnTo>
-                  <a:lnTo>
-                    <a:pt x="802580" y="1369292"/>
-                  </a:lnTo>
-                  <a:lnTo>
-                    <a:pt x="874203" y="1461411"/>
-                  </a:lnTo>
-                  <a:lnTo>
-                    <a:pt x="945825" y="1549518"/>
-                  </a:lnTo>
-                  <a:lnTo>
-                    <a:pt x="1017448" y="1633785"/>
-                  </a:lnTo>
-                  <a:lnTo>
-                    <a:pt x="1089070" y="1714382"/>
-                  </a:lnTo>
-                  <a:lnTo>
-                    <a:pt x="1160693" y="1791467"/>
-                  </a:lnTo>
-                  <a:lnTo>
-                    <a:pt x="1232315" y="1865194"/>
-                  </a:lnTo>
-                  <a:lnTo>
-                    <a:pt x="1303938" y="1935709"/>
-                  </a:lnTo>
-                  <a:lnTo>
-                    <a:pt x="1375561" y="2003151"/>
-                  </a:lnTo>
-                  <a:lnTo>
-                    <a:pt x="1447183" y="2067656"/>
-                  </a:lnTo>
-                  <a:lnTo>
-                    <a:pt x="1518806" y="2129350"/>
-                  </a:lnTo>
-                  <a:lnTo>
-                    <a:pt x="1590428" y="2188357"/>
-                  </a:lnTo>
-                  <a:lnTo>
-                    <a:pt x="1662051" y="2244792"/>
-                  </a:lnTo>
-                  <a:lnTo>
-                    <a:pt x="1733673" y="2298769"/>
-                  </a:lnTo>
-                  <a:lnTo>
-                    <a:pt x="1805296" y="2350395"/>
-                  </a:lnTo>
-                  <a:lnTo>
-                    <a:pt x="1876918" y="2399771"/>
-                  </a:lnTo>
-                  <a:lnTo>
-                    <a:pt x="1948541" y="2446996"/>
-                  </a:lnTo>
-                  <a:lnTo>
-                    <a:pt x="2020163" y="2492164"/>
-                  </a:lnTo>
-                  <a:lnTo>
-                    <a:pt x="2091786" y="2535364"/>
-                  </a:lnTo>
-                  <a:lnTo>
-                    <a:pt x="2163408" y="2576681"/>
-                  </a:lnTo>
-                  <a:lnTo>
-                    <a:pt x="2235031" y="2616199"/>
-                  </a:lnTo>
-                  <a:lnTo>
-                    <a:pt x="2306653" y="2653995"/>
-                  </a:lnTo>
-                  <a:lnTo>
-                    <a:pt x="2378276" y="2637560"/>
-                  </a:lnTo>
-                  <a:lnTo>
-                    <a:pt x="2449898" y="2620366"/>
-                  </a:lnTo>
-                  <a:lnTo>
-                    <a:pt x="2521521" y="2602822"/>
-                  </a:lnTo>
-                  <a:lnTo>
-                    <a:pt x="2593143" y="2584921"/>
-                  </a:lnTo>
-                  <a:lnTo>
-                    <a:pt x="2664766" y="2566657"/>
-                  </a:lnTo>
-                  <a:lnTo>
-                    <a:pt x="2736389" y="2548021"/>
-                  </a:lnTo>
-                  <a:lnTo>
-                    <a:pt x="2808011" y="2529007"/>
-                  </a:lnTo>
-                  <a:lnTo>
-                    <a:pt x="2879634" y="2509607"/>
-                  </a:lnTo>
-                  <a:lnTo>
-                    <a:pt x="2951256" y="2489812"/>
-                  </a:lnTo>
-                  <a:lnTo>
-                    <a:pt x="3022879" y="2469615"/>
-                  </a:lnTo>
-                  <a:lnTo>
-                    <a:pt x="3094501" y="2449007"/>
-                  </a:lnTo>
-                  <a:lnTo>
-                    <a:pt x="3166124" y="2427981"/>
-                  </a:lnTo>
-                  <a:lnTo>
-                    <a:pt x="3237746" y="2406528"/>
-                  </a:lnTo>
-                  <a:lnTo>
-                    <a:pt x="3309369" y="2384638"/>
-                  </a:lnTo>
-                  <a:lnTo>
-                    <a:pt x="3380991" y="2362304"/>
-                  </a:lnTo>
-                  <a:lnTo>
-                    <a:pt x="3452614" y="2339516"/>
-                  </a:lnTo>
-                  <a:lnTo>
-                    <a:pt x="3524236" y="2316265"/>
-                  </a:lnTo>
-                  <a:lnTo>
-                    <a:pt x="3595859" y="2292542"/>
-                  </a:lnTo>
-                  <a:lnTo>
-                    <a:pt x="3667481" y="2268336"/>
-                  </a:lnTo>
-                  <a:lnTo>
-                    <a:pt x="3739104" y="2243639"/>
-                  </a:lnTo>
-                  <a:lnTo>
-                    <a:pt x="3810726" y="2218440"/>
-                  </a:lnTo>
-                  <a:lnTo>
-                    <a:pt x="3882349" y="2192728"/>
-                  </a:lnTo>
-                  <a:lnTo>
-                    <a:pt x="3953971" y="2166494"/>
-                  </a:lnTo>
-                  <a:lnTo>
-                    <a:pt x="4025594" y="2139727"/>
-                  </a:lnTo>
-                  <a:lnTo>
-                    <a:pt x="4097216" y="2112417"/>
-                  </a:lnTo>
-                  <a:lnTo>
-                    <a:pt x="4168839" y="2084551"/>
-                  </a:lnTo>
-                  <a:lnTo>
-                    <a:pt x="4240462" y="2056119"/>
-                  </a:lnTo>
-                  <a:lnTo>
-                    <a:pt x="4312084" y="2027109"/>
-                  </a:lnTo>
-                  <a:lnTo>
-                    <a:pt x="4383707" y="1997510"/>
-                  </a:lnTo>
-                  <a:lnTo>
-                    <a:pt x="4455329" y="1967309"/>
-                  </a:lnTo>
-                  <a:lnTo>
-                    <a:pt x="4526952" y="1936495"/>
-                  </a:lnTo>
-                  <a:lnTo>
-                    <a:pt x="4598574" y="1905054"/>
-                  </a:lnTo>
-                  <a:lnTo>
-                    <a:pt x="4670197" y="1872975"/>
-                  </a:lnTo>
-                  <a:lnTo>
-                    <a:pt x="4741819" y="1840244"/>
-                  </a:lnTo>
-                  <a:lnTo>
-                    <a:pt x="4813442" y="1806847"/>
+                    <a:pt x="45644" y="96867"/>
+                  </a:lnTo>
+                  <a:lnTo>
+                    <a:pt x="117267" y="242336"/>
+                  </a:lnTo>
+                  <a:lnTo>
+                    <a:pt x="188889" y="381557"/>
+                  </a:lnTo>
+                  <a:lnTo>
+                    <a:pt x="260512" y="514798"/>
+                  </a:lnTo>
+                  <a:lnTo>
+                    <a:pt x="332134" y="642317"/>
+                  </a:lnTo>
+                  <a:lnTo>
+                    <a:pt x="403757" y="764358"/>
+                  </a:lnTo>
+                  <a:lnTo>
+                    <a:pt x="475379" y="881158"/>
+                  </a:lnTo>
+                  <a:lnTo>
+                    <a:pt x="547002" y="992941"/>
+                  </a:lnTo>
+                  <a:lnTo>
+                    <a:pt x="618624" y="1099923"/>
+                  </a:lnTo>
+                  <a:lnTo>
+                    <a:pt x="690247" y="1202310"/>
+                  </a:lnTo>
+                  <a:lnTo>
+                    <a:pt x="761870" y="1300299"/>
+                  </a:lnTo>
+                  <a:lnTo>
+                    <a:pt x="833492" y="1394080"/>
+                  </a:lnTo>
+                  <a:lnTo>
+                    <a:pt x="905115" y="1483833"/>
+                  </a:lnTo>
+                  <a:lnTo>
+                    <a:pt x="976737" y="1569730"/>
+                  </a:lnTo>
+                  <a:lnTo>
+                    <a:pt x="1048360" y="1651939"/>
+                  </a:lnTo>
+                  <a:lnTo>
+                    <a:pt x="1119982" y="1730616"/>
+                  </a:lnTo>
+                  <a:lnTo>
+                    <a:pt x="1191605" y="1805915"/>
+                  </a:lnTo>
+                  <a:lnTo>
+                    <a:pt x="1263227" y="1877979"/>
+                  </a:lnTo>
+                  <a:lnTo>
+                    <a:pt x="1334850" y="1946948"/>
+                  </a:lnTo>
+                  <a:lnTo>
+                    <a:pt x="1406472" y="2012954"/>
+                  </a:lnTo>
+                  <a:lnTo>
+                    <a:pt x="1478095" y="2076126"/>
+                  </a:lnTo>
+                  <a:lnTo>
+                    <a:pt x="1549717" y="2136584"/>
+                  </a:lnTo>
+                  <a:lnTo>
+                    <a:pt x="1621340" y="2194446"/>
+                  </a:lnTo>
+                  <a:lnTo>
+                    <a:pt x="1692962" y="2249822"/>
+                  </a:lnTo>
+                  <a:lnTo>
+                    <a:pt x="1764585" y="2302820"/>
+                  </a:lnTo>
+                  <a:lnTo>
+                    <a:pt x="1836207" y="2353542"/>
+                  </a:lnTo>
+                  <a:lnTo>
+                    <a:pt x="1907830" y="2402085"/>
+                  </a:lnTo>
+                  <a:lnTo>
+                    <a:pt x="1979452" y="2448543"/>
+                  </a:lnTo>
+                  <a:lnTo>
+                    <a:pt x="2051075" y="2493006"/>
+                  </a:lnTo>
+                  <a:lnTo>
+                    <a:pt x="2122698" y="2535559"/>
+                  </a:lnTo>
+                  <a:lnTo>
+                    <a:pt x="2194320" y="2576284"/>
+                  </a:lnTo>
+                  <a:lnTo>
+                    <a:pt x="2265943" y="2615260"/>
+                  </a:lnTo>
+                  <a:lnTo>
+                    <a:pt x="2337565" y="2652563"/>
+                  </a:lnTo>
+                  <a:lnTo>
+                    <a:pt x="2409188" y="2637252"/>
+                  </a:lnTo>
+                  <a:lnTo>
+                    <a:pt x="2480810" y="2619000"/>
+                  </a:lnTo>
+                  <a:lnTo>
+                    <a:pt x="2552433" y="2600356"/>
+                  </a:lnTo>
+                  <a:lnTo>
+                    <a:pt x="2624055" y="2581309"/>
+                  </a:lnTo>
+                  <a:lnTo>
+                    <a:pt x="2695678" y="2561852"/>
+                  </a:lnTo>
+                  <a:lnTo>
+                    <a:pt x="2767300" y="2541975"/>
+                  </a:lnTo>
+                  <a:lnTo>
+                    <a:pt x="2838923" y="2521669"/>
+                  </a:lnTo>
+                  <a:lnTo>
+                    <a:pt x="2910545" y="2500926"/>
+                  </a:lnTo>
+                  <a:lnTo>
+                    <a:pt x="2982168" y="2479736"/>
+                  </a:lnTo>
+                  <a:lnTo>
+                    <a:pt x="3053790" y="2458088"/>
+                  </a:lnTo>
+                  <a:lnTo>
+                    <a:pt x="3125413" y="2435974"/>
+                  </a:lnTo>
+                  <a:lnTo>
+                    <a:pt x="3197035" y="2413383"/>
+                  </a:lnTo>
+                  <a:lnTo>
+                    <a:pt x="3268658" y="2390305"/>
+                  </a:lnTo>
+                  <a:lnTo>
+                    <a:pt x="3340280" y="2366730"/>
+                  </a:lnTo>
+                  <a:lnTo>
+                    <a:pt x="3411903" y="2342646"/>
+                  </a:lnTo>
+                  <a:lnTo>
+                    <a:pt x="3483525" y="2318043"/>
+                  </a:lnTo>
+                  <a:lnTo>
+                    <a:pt x="3555148" y="2292909"/>
+                  </a:lnTo>
+                  <a:lnTo>
+                    <a:pt x="3626771" y="2267234"/>
+                  </a:lnTo>
+                  <a:lnTo>
+                    <a:pt x="3698393" y="2241005"/>
+                  </a:lnTo>
+                  <a:lnTo>
+                    <a:pt x="3770016" y="2214210"/>
+                  </a:lnTo>
+                  <a:lnTo>
+                    <a:pt x="3841638" y="2186838"/>
+                  </a:lnTo>
+                  <a:lnTo>
+                    <a:pt x="3913261" y="2158875"/>
+                  </a:lnTo>
+                  <a:lnTo>
+                    <a:pt x="3984883" y="2130310"/>
+                  </a:lnTo>
+                  <a:lnTo>
+                    <a:pt x="4056506" y="2101129"/>
+                  </a:lnTo>
+                  <a:lnTo>
+                    <a:pt x="4128128" y="2071318"/>
+                  </a:lnTo>
+                  <a:lnTo>
+                    <a:pt x="4199751" y="2040865"/>
+                  </a:lnTo>
+                  <a:lnTo>
+                    <a:pt x="4271373" y="2009755"/>
+                  </a:lnTo>
+                  <a:lnTo>
+                    <a:pt x="4342996" y="1977975"/>
+                  </a:lnTo>
+                  <a:lnTo>
+                    <a:pt x="4414618" y="1945509"/>
+                  </a:lnTo>
+                  <a:lnTo>
+                    <a:pt x="4486241" y="1912343"/>
+                  </a:lnTo>
+                  <a:lnTo>
+                    <a:pt x="4557863" y="1878462"/>
+                  </a:lnTo>
+                  <a:lnTo>
+                    <a:pt x="4629486" y="1843851"/>
+                  </a:lnTo>
+                  <a:lnTo>
+                    <a:pt x="4701108" y="1808493"/>
+                  </a:lnTo>
+                  <a:lnTo>
+                    <a:pt x="4772731" y="1772374"/>
+                  </a:lnTo>
+                  <a:lnTo>
+                    <a:pt x="4844353" y="1735475"/>
                   </a:lnTo>
                 </a:path>
               </a:pathLst>
@@ -3686,312 +3686,312 @@
           </p:nvSpPr>
           <p:spPr>
             <a:xfrm>
-              <a:off x="1172049" y="4727916"/>
-              <a:ext cx="7090630" cy="654806"/>
+              <a:off x="1172049" y="4728621"/>
+              <a:ext cx="7090630" cy="649816"/>
             </a:xfrm>
             <a:custGeom>
               <a:avLst/>
               <a:pathLst>
-                <a:path w="7090630" h="654806">
+                <a:path w="7090630" h="649816">
                   <a:moveTo>
-                    <a:pt x="7090630" y="654806"/>
+                    <a:pt x="7090630" y="649816"/>
                   </a:moveTo>
                   <a:lnTo>
-                    <a:pt x="7019007" y="646856"/>
-                  </a:lnTo>
-                  <a:lnTo>
-                    <a:pt x="6947385" y="638544"/>
-                  </a:lnTo>
-                  <a:lnTo>
-                    <a:pt x="6875762" y="629853"/>
-                  </a:lnTo>
-                  <a:lnTo>
-                    <a:pt x="6804139" y="620766"/>
-                  </a:lnTo>
-                  <a:lnTo>
-                    <a:pt x="6732517" y="611266"/>
-                  </a:lnTo>
-                  <a:lnTo>
-                    <a:pt x="6660894" y="601333"/>
-                  </a:lnTo>
-                  <a:lnTo>
-                    <a:pt x="6589272" y="590947"/>
-                  </a:lnTo>
-                  <a:lnTo>
-                    <a:pt x="6517649" y="580088"/>
-                  </a:lnTo>
-                  <a:lnTo>
-                    <a:pt x="6446027" y="568735"/>
-                  </a:lnTo>
-                  <a:lnTo>
-                    <a:pt x="6374404" y="556865"/>
-                  </a:lnTo>
-                  <a:lnTo>
-                    <a:pt x="6302782" y="544453"/>
-                  </a:lnTo>
-                  <a:lnTo>
-                    <a:pt x="6231159" y="531477"/>
-                  </a:lnTo>
-                  <a:lnTo>
-                    <a:pt x="6159537" y="517909"/>
-                  </a:lnTo>
-                  <a:lnTo>
-                    <a:pt x="6087914" y="503723"/>
-                  </a:lnTo>
-                  <a:lnTo>
-                    <a:pt x="6016292" y="488891"/>
-                  </a:lnTo>
-                  <a:lnTo>
-                    <a:pt x="5944669" y="473384"/>
-                  </a:lnTo>
-                  <a:lnTo>
-                    <a:pt x="5873047" y="457170"/>
-                  </a:lnTo>
-                  <a:lnTo>
-                    <a:pt x="5801424" y="440218"/>
-                  </a:lnTo>
-                  <a:lnTo>
-                    <a:pt x="5729802" y="422493"/>
-                  </a:lnTo>
-                  <a:lnTo>
-                    <a:pt x="5658179" y="403961"/>
-                  </a:lnTo>
-                  <a:lnTo>
-                    <a:pt x="5586557" y="384585"/>
-                  </a:lnTo>
-                  <a:lnTo>
-                    <a:pt x="5514934" y="364326"/>
-                  </a:lnTo>
-                  <a:lnTo>
-                    <a:pt x="5443311" y="343144"/>
-                  </a:lnTo>
-                  <a:lnTo>
-                    <a:pt x="5371689" y="320998"/>
-                  </a:lnTo>
-                  <a:lnTo>
-                    <a:pt x="5300066" y="297843"/>
-                  </a:lnTo>
-                  <a:lnTo>
-                    <a:pt x="5228444" y="273633"/>
-                  </a:lnTo>
-                  <a:lnTo>
-                    <a:pt x="5156821" y="248320"/>
-                  </a:lnTo>
-                  <a:lnTo>
-                    <a:pt x="5085199" y="221854"/>
-                  </a:lnTo>
-                  <a:lnTo>
-                    <a:pt x="5013576" y="194183"/>
-                  </a:lnTo>
-                  <a:lnTo>
-                    <a:pt x="4941954" y="165251"/>
-                  </a:lnTo>
-                  <a:lnTo>
-                    <a:pt x="4870331" y="135002"/>
-                  </a:lnTo>
-                  <a:lnTo>
-                    <a:pt x="4798709" y="103374"/>
-                  </a:lnTo>
-                  <a:lnTo>
-                    <a:pt x="4727086" y="70306"/>
-                  </a:lnTo>
-                  <a:lnTo>
-                    <a:pt x="4655464" y="35731"/>
+                    <a:pt x="7019007" y="641791"/>
+                  </a:lnTo>
+                  <a:lnTo>
+                    <a:pt x="6947385" y="633406"/>
+                  </a:lnTo>
+                  <a:lnTo>
+                    <a:pt x="6875762" y="624645"/>
+                  </a:lnTo>
+                  <a:lnTo>
+                    <a:pt x="6804139" y="615491"/>
+                  </a:lnTo>
+                  <a:lnTo>
+                    <a:pt x="6732517" y="605926"/>
+                  </a:lnTo>
+                  <a:lnTo>
+                    <a:pt x="6660894" y="595931"/>
+                  </a:lnTo>
+                  <a:lnTo>
+                    <a:pt x="6589272" y="585488"/>
+                  </a:lnTo>
+                  <a:lnTo>
+                    <a:pt x="6517649" y="574576"/>
+                  </a:lnTo>
+                  <a:lnTo>
+                    <a:pt x="6446027" y="563175"/>
+                  </a:lnTo>
+                  <a:lnTo>
+                    <a:pt x="6374404" y="551262"/>
+                  </a:lnTo>
+                  <a:lnTo>
+                    <a:pt x="6302782" y="538814"/>
+                  </a:lnTo>
+                  <a:lnTo>
+                    <a:pt x="6231159" y="525808"/>
+                  </a:lnTo>
+                  <a:lnTo>
+                    <a:pt x="6159537" y="512217"/>
+                  </a:lnTo>
+                  <a:lnTo>
+                    <a:pt x="6087914" y="498017"/>
+                  </a:lnTo>
+                  <a:lnTo>
+                    <a:pt x="6016292" y="483180"/>
+                  </a:lnTo>
+                  <a:lnTo>
+                    <a:pt x="5944669" y="467677"/>
+                  </a:lnTo>
+                  <a:lnTo>
+                    <a:pt x="5873047" y="451478"/>
+                  </a:lnTo>
+                  <a:lnTo>
+                    <a:pt x="5801424" y="434552"/>
+                  </a:lnTo>
+                  <a:lnTo>
+                    <a:pt x="5729802" y="416867"/>
+                  </a:lnTo>
+                  <a:lnTo>
+                    <a:pt x="5658179" y="398388"/>
+                  </a:lnTo>
+                  <a:lnTo>
+                    <a:pt x="5586557" y="379079"/>
+                  </a:lnTo>
+                  <a:lnTo>
+                    <a:pt x="5514934" y="358904"/>
+                  </a:lnTo>
+                  <a:lnTo>
+                    <a:pt x="5443311" y="337824"/>
+                  </a:lnTo>
+                  <a:lnTo>
+                    <a:pt x="5371689" y="315797"/>
+                  </a:lnTo>
+                  <a:lnTo>
+                    <a:pt x="5300066" y="292782"/>
+                  </a:lnTo>
+                  <a:lnTo>
+                    <a:pt x="5228444" y="268735"/>
+                  </a:lnTo>
+                  <a:lnTo>
+                    <a:pt x="5156821" y="243607"/>
+                  </a:lnTo>
+                  <a:lnTo>
+                    <a:pt x="5085199" y="217353"/>
+                  </a:lnTo>
+                  <a:lnTo>
+                    <a:pt x="5013576" y="189920"/>
+                  </a:lnTo>
+                  <a:lnTo>
+                    <a:pt x="4941954" y="161256"/>
+                  </a:lnTo>
+                  <a:lnTo>
+                    <a:pt x="4870331" y="131305"/>
+                  </a:lnTo>
+                  <a:lnTo>
+                    <a:pt x="4798709" y="100010"/>
+                  </a:lnTo>
+                  <a:lnTo>
+                    <a:pt x="4727086" y="67311"/>
+                  </a:lnTo>
+                  <a:lnTo>
+                    <a:pt x="4655464" y="33145"/>
                   </a:lnTo>
                   <a:lnTo>
                     <a:pt x="4583841" y="0"/>
                   </a:lnTo>
                   <a:lnTo>
-                    <a:pt x="4512219" y="16516"/>
-                  </a:lnTo>
-                  <a:lnTo>
-                    <a:pt x="4440596" y="32704"/>
-                  </a:lnTo>
-                  <a:lnTo>
-                    <a:pt x="4368974" y="48569"/>
-                  </a:lnTo>
-                  <a:lnTo>
-                    <a:pt x="4297351" y="64119"/>
-                  </a:lnTo>
-                  <a:lnTo>
-                    <a:pt x="4225729" y="79358"/>
-                  </a:lnTo>
-                  <a:lnTo>
-                    <a:pt x="4154106" y="94294"/>
-                  </a:lnTo>
-                  <a:lnTo>
-                    <a:pt x="4082483" y="108933"/>
-                  </a:lnTo>
-                  <a:lnTo>
-                    <a:pt x="4010861" y="123280"/>
-                  </a:lnTo>
-                  <a:lnTo>
-                    <a:pt x="3939238" y="137342"/>
-                  </a:lnTo>
-                  <a:lnTo>
-                    <a:pt x="3867616" y="151123"/>
-                  </a:lnTo>
-                  <a:lnTo>
-                    <a:pt x="3795993" y="164630"/>
-                  </a:lnTo>
-                  <a:lnTo>
-                    <a:pt x="3724371" y="177868"/>
-                  </a:lnTo>
-                  <a:lnTo>
-                    <a:pt x="3652748" y="190842"/>
-                  </a:lnTo>
-                  <a:lnTo>
-                    <a:pt x="3581126" y="203558"/>
-                  </a:lnTo>
-                  <a:lnTo>
-                    <a:pt x="3509503" y="216021"/>
-                  </a:lnTo>
-                  <a:lnTo>
-                    <a:pt x="3437881" y="228235"/>
-                  </a:lnTo>
-                  <a:lnTo>
-                    <a:pt x="3366258" y="240206"/>
-                  </a:lnTo>
-                  <a:lnTo>
-                    <a:pt x="3294636" y="251939"/>
-                  </a:lnTo>
-                  <a:lnTo>
-                    <a:pt x="3223013" y="263438"/>
-                  </a:lnTo>
-                  <a:lnTo>
-                    <a:pt x="3151391" y="274708"/>
-                  </a:lnTo>
-                  <a:lnTo>
-                    <a:pt x="3079768" y="285754"/>
-                  </a:lnTo>
-                  <a:lnTo>
-                    <a:pt x="3008146" y="296580"/>
-                  </a:lnTo>
-                  <a:lnTo>
-                    <a:pt x="2936523" y="307190"/>
-                  </a:lnTo>
-                  <a:lnTo>
-                    <a:pt x="2864901" y="317589"/>
-                  </a:lnTo>
-                  <a:lnTo>
-                    <a:pt x="2793278" y="327780"/>
-                  </a:lnTo>
-                  <a:lnTo>
-                    <a:pt x="2721655" y="337769"/>
-                  </a:lnTo>
-                  <a:lnTo>
-                    <a:pt x="2650033" y="347559"/>
-                  </a:lnTo>
-                  <a:lnTo>
-                    <a:pt x="2578410" y="357154"/>
-                  </a:lnTo>
-                  <a:lnTo>
-                    <a:pt x="2506788" y="366557"/>
-                  </a:lnTo>
-                  <a:lnTo>
-                    <a:pt x="2435165" y="375774"/>
-                  </a:lnTo>
-                  <a:lnTo>
-                    <a:pt x="2363543" y="384807"/>
-                  </a:lnTo>
-                  <a:lnTo>
-                    <a:pt x="2291920" y="393660"/>
-                  </a:lnTo>
-                  <a:lnTo>
-                    <a:pt x="2220298" y="402336"/>
-                  </a:lnTo>
-                  <a:lnTo>
-                    <a:pt x="2148675" y="410840"/>
-                  </a:lnTo>
-                  <a:lnTo>
-                    <a:pt x="2077053" y="419175"/>
-                  </a:lnTo>
-                  <a:lnTo>
-                    <a:pt x="2005430" y="427343"/>
-                  </a:lnTo>
-                  <a:lnTo>
-                    <a:pt x="1933808" y="435349"/>
-                  </a:lnTo>
-                  <a:lnTo>
-                    <a:pt x="1862185" y="443196"/>
-                  </a:lnTo>
-                  <a:lnTo>
-                    <a:pt x="1790563" y="450886"/>
-                  </a:lnTo>
-                  <a:lnTo>
-                    <a:pt x="1718940" y="458423"/>
-                  </a:lnTo>
-                  <a:lnTo>
-                    <a:pt x="1647318" y="465810"/>
-                  </a:lnTo>
-                  <a:lnTo>
-                    <a:pt x="1575695" y="473049"/>
-                  </a:lnTo>
-                  <a:lnTo>
-                    <a:pt x="1504073" y="480145"/>
-                  </a:lnTo>
-                  <a:lnTo>
-                    <a:pt x="1432450" y="487099"/>
-                  </a:lnTo>
-                  <a:lnTo>
-                    <a:pt x="1360827" y="493915"/>
-                  </a:lnTo>
-                  <a:lnTo>
-                    <a:pt x="1289205" y="500595"/>
-                  </a:lnTo>
-                  <a:lnTo>
-                    <a:pt x="1217582" y="507142"/>
-                  </a:lnTo>
-                  <a:lnTo>
-                    <a:pt x="1145960" y="513559"/>
-                  </a:lnTo>
-                  <a:lnTo>
-                    <a:pt x="1074337" y="519847"/>
-                  </a:lnTo>
-                  <a:lnTo>
-                    <a:pt x="1002715" y="526011"/>
-                  </a:lnTo>
-                  <a:lnTo>
-                    <a:pt x="931092" y="532052"/>
-                  </a:lnTo>
-                  <a:lnTo>
-                    <a:pt x="859470" y="537972"/>
-                  </a:lnTo>
-                  <a:lnTo>
-                    <a:pt x="787847" y="543775"/>
-                  </a:lnTo>
-                  <a:lnTo>
-                    <a:pt x="716225" y="549462"/>
-                  </a:lnTo>
-                  <a:lnTo>
-                    <a:pt x="644602" y="555036"/>
-                  </a:lnTo>
-                  <a:lnTo>
-                    <a:pt x="572980" y="560499"/>
-                  </a:lnTo>
-                  <a:lnTo>
-                    <a:pt x="501357" y="565853"/>
-                  </a:lnTo>
-                  <a:lnTo>
-                    <a:pt x="429735" y="571100"/>
-                  </a:lnTo>
-                  <a:lnTo>
-                    <a:pt x="358112" y="576243"/>
-                  </a:lnTo>
-                  <a:lnTo>
-                    <a:pt x="286490" y="581283"/>
-                  </a:lnTo>
-                  <a:lnTo>
-                    <a:pt x="214867" y="586223"/>
-                  </a:lnTo>
-                  <a:lnTo>
-                    <a:pt x="143245" y="591065"/>
-                  </a:lnTo>
-                  <a:lnTo>
-                    <a:pt x="71622" y="595810"/>
-                  </a:lnTo>
-                  <a:lnTo>
-                    <a:pt x="0" y="600461"/>
+                    <a:pt x="4512219" y="17488"/>
+                  </a:lnTo>
+                  <a:lnTo>
+                    <a:pt x="4440596" y="34608"/>
+                  </a:lnTo>
+                  <a:lnTo>
+                    <a:pt x="4368974" y="51367"/>
+                  </a:lnTo>
+                  <a:lnTo>
+                    <a:pt x="4297351" y="67771"/>
+                  </a:lnTo>
+                  <a:lnTo>
+                    <a:pt x="4225729" y="83830"/>
+                  </a:lnTo>
+                  <a:lnTo>
+                    <a:pt x="4154106" y="99549"/>
+                  </a:lnTo>
+                  <a:lnTo>
+                    <a:pt x="4082483" y="114937"/>
+                  </a:lnTo>
+                  <a:lnTo>
+                    <a:pt x="4010861" y="130000"/>
+                  </a:lnTo>
+                  <a:lnTo>
+                    <a:pt x="3939238" y="144745"/>
+                  </a:lnTo>
+                  <a:lnTo>
+                    <a:pt x="3867616" y="159179"/>
+                  </a:lnTo>
+                  <a:lnTo>
+                    <a:pt x="3795993" y="173309"/>
+                  </a:lnTo>
+                  <a:lnTo>
+                    <a:pt x="3724371" y="187140"/>
+                  </a:lnTo>
+                  <a:lnTo>
+                    <a:pt x="3652748" y="200679"/>
+                  </a:lnTo>
+                  <a:lnTo>
+                    <a:pt x="3581126" y="213932"/>
+                  </a:lnTo>
+                  <a:lnTo>
+                    <a:pt x="3509503" y="226906"/>
+                  </a:lnTo>
+                  <a:lnTo>
+                    <a:pt x="3437881" y="239606"/>
+                  </a:lnTo>
+                  <a:lnTo>
+                    <a:pt x="3366258" y="252037"/>
+                  </a:lnTo>
+                  <a:lnTo>
+                    <a:pt x="3294636" y="264207"/>
+                  </a:lnTo>
+                  <a:lnTo>
+                    <a:pt x="3223013" y="276119"/>
+                  </a:lnTo>
+                  <a:lnTo>
+                    <a:pt x="3151391" y="287781"/>
+                  </a:lnTo>
+                  <a:lnTo>
+                    <a:pt x="3079768" y="299196"/>
+                  </a:lnTo>
+                  <a:lnTo>
+                    <a:pt x="3008146" y="310370"/>
+                  </a:lnTo>
+                  <a:lnTo>
+                    <a:pt x="2936523" y="321308"/>
+                  </a:lnTo>
+                  <a:lnTo>
+                    <a:pt x="2864901" y="332015"/>
+                  </a:lnTo>
+                  <a:lnTo>
+                    <a:pt x="2793278" y="342497"/>
+                  </a:lnTo>
+                  <a:lnTo>
+                    <a:pt x="2721655" y="352757"/>
+                  </a:lnTo>
+                  <a:lnTo>
+                    <a:pt x="2650033" y="362801"/>
+                  </a:lnTo>
+                  <a:lnTo>
+                    <a:pt x="2578410" y="372632"/>
+                  </a:lnTo>
+                  <a:lnTo>
+                    <a:pt x="2506788" y="382257"/>
+                  </a:lnTo>
+                  <a:lnTo>
+                    <a:pt x="2435165" y="391678"/>
+                  </a:lnTo>
+                  <a:lnTo>
+                    <a:pt x="2363543" y="400900"/>
+                  </a:lnTo>
+                  <a:lnTo>
+                    <a:pt x="2291920" y="409927"/>
+                  </a:lnTo>
+                  <a:lnTo>
+                    <a:pt x="2220298" y="418764"/>
+                  </a:lnTo>
+                  <a:lnTo>
+                    <a:pt x="2148675" y="427415"/>
+                  </a:lnTo>
+                  <a:lnTo>
+                    <a:pt x="2077053" y="435883"/>
+                  </a:lnTo>
+                  <a:lnTo>
+                    <a:pt x="2005430" y="444172"/>
+                  </a:lnTo>
+                  <a:lnTo>
+                    <a:pt x="1933808" y="452286"/>
+                  </a:lnTo>
+                  <a:lnTo>
+                    <a:pt x="1862185" y="460229"/>
+                  </a:lnTo>
+                  <a:lnTo>
+                    <a:pt x="1790563" y="468005"/>
+                  </a:lnTo>
+                  <a:lnTo>
+                    <a:pt x="1718940" y="475616"/>
+                  </a:lnTo>
+                  <a:lnTo>
+                    <a:pt x="1647318" y="483067"/>
+                  </a:lnTo>
+                  <a:lnTo>
+                    <a:pt x="1575695" y="490360"/>
+                  </a:lnTo>
+                  <a:lnTo>
+                    <a:pt x="1504073" y="497499"/>
+                  </a:lnTo>
+                  <a:lnTo>
+                    <a:pt x="1432450" y="504488"/>
+                  </a:lnTo>
+                  <a:lnTo>
+                    <a:pt x="1360827" y="511329"/>
+                  </a:lnTo>
+                  <a:lnTo>
+                    <a:pt x="1289205" y="518026"/>
+                  </a:lnTo>
+                  <a:lnTo>
+                    <a:pt x="1217582" y="524582"/>
+                  </a:lnTo>
+                  <a:lnTo>
+                    <a:pt x="1145960" y="530999"/>
+                  </a:lnTo>
+                  <a:lnTo>
+                    <a:pt x="1074337" y="537281"/>
+                  </a:lnTo>
+                  <a:lnTo>
+                    <a:pt x="1002715" y="543430"/>
+                  </a:lnTo>
+                  <a:lnTo>
+                    <a:pt x="931092" y="549449"/>
+                  </a:lnTo>
+                  <a:lnTo>
+                    <a:pt x="859470" y="555341"/>
+                  </a:lnTo>
+                  <a:lnTo>
+                    <a:pt x="787847" y="561109"/>
+                  </a:lnTo>
+                  <a:lnTo>
+                    <a:pt x="716225" y="566756"/>
+                  </a:lnTo>
+                  <a:lnTo>
+                    <a:pt x="644602" y="572283"/>
+                  </a:lnTo>
+                  <a:lnTo>
+                    <a:pt x="572980" y="577693"/>
+                  </a:lnTo>
+                  <a:lnTo>
+                    <a:pt x="501357" y="582989"/>
+                  </a:lnTo>
+                  <a:lnTo>
+                    <a:pt x="429735" y="588174"/>
+                  </a:lnTo>
+                  <a:lnTo>
+                    <a:pt x="358112" y="593249"/>
+                  </a:lnTo>
+                  <a:lnTo>
+                    <a:pt x="286490" y="598216"/>
+                  </a:lnTo>
+                  <a:lnTo>
+                    <a:pt x="214867" y="603080"/>
+                  </a:lnTo>
+                  <a:lnTo>
+                    <a:pt x="143245" y="607840"/>
+                  </a:lnTo>
+                  <a:lnTo>
+                    <a:pt x="71622" y="612500"/>
+                  </a:lnTo>
+                  <a:lnTo>
+                    <a:pt x="0" y="617061"/>
                   </a:lnTo>
                 </a:path>
               </a:pathLst>
@@ -4011,312 +4011,312 @@
           </p:nvSpPr>
           <p:spPr>
             <a:xfrm>
-              <a:off x="1172049" y="3744579"/>
-              <a:ext cx="7090630" cy="1271684"/>
+              <a:off x="1172049" y="3848513"/>
+              <a:ext cx="7090630" cy="1149619"/>
             </a:xfrm>
             <a:custGeom>
               <a:avLst/>
               <a:pathLst>
-                <a:path w="7090630" h="1271684">
+                <a:path w="7090630" h="1149619">
                   <a:moveTo>
                     <a:pt x="0" y="0"/>
                   </a:moveTo>
                   <a:lnTo>
-                    <a:pt x="71622" y="22004"/>
-                  </a:lnTo>
-                  <a:lnTo>
-                    <a:pt x="143245" y="43742"/>
-                  </a:lnTo>
-                  <a:lnTo>
-                    <a:pt x="214867" y="65216"/>
-                  </a:lnTo>
-                  <a:lnTo>
-                    <a:pt x="286490" y="86429"/>
-                  </a:lnTo>
-                  <a:lnTo>
-                    <a:pt x="358112" y="107385"/>
-                  </a:lnTo>
-                  <a:lnTo>
-                    <a:pt x="429735" y="128086"/>
-                  </a:lnTo>
-                  <a:lnTo>
-                    <a:pt x="501357" y="148536"/>
-                  </a:lnTo>
-                  <a:lnTo>
-                    <a:pt x="572980" y="168738"/>
-                  </a:lnTo>
-                  <a:lnTo>
-                    <a:pt x="644602" y="188694"/>
-                  </a:lnTo>
-                  <a:lnTo>
-                    <a:pt x="716225" y="208409"/>
-                  </a:lnTo>
-                  <a:lnTo>
-                    <a:pt x="787847" y="227884"/>
-                  </a:lnTo>
-                  <a:lnTo>
-                    <a:pt x="859470" y="247122"/>
-                  </a:lnTo>
-                  <a:lnTo>
-                    <a:pt x="931092" y="266127"/>
-                  </a:lnTo>
-                  <a:lnTo>
-                    <a:pt x="1002715" y="284901"/>
-                  </a:lnTo>
-                  <a:lnTo>
-                    <a:pt x="1074337" y="303448"/>
-                  </a:lnTo>
-                  <a:lnTo>
-                    <a:pt x="1145960" y="321769"/>
-                  </a:lnTo>
-                  <a:lnTo>
-                    <a:pt x="1217582" y="339868"/>
-                  </a:lnTo>
-                  <a:lnTo>
-                    <a:pt x="1289205" y="357747"/>
-                  </a:lnTo>
-                  <a:lnTo>
-                    <a:pt x="1360827" y="375409"/>
-                  </a:lnTo>
-                  <a:lnTo>
-                    <a:pt x="1432450" y="392856"/>
-                  </a:lnTo>
-                  <a:lnTo>
-                    <a:pt x="1504073" y="410092"/>
-                  </a:lnTo>
-                  <a:lnTo>
-                    <a:pt x="1575695" y="427119"/>
-                  </a:lnTo>
-                  <a:lnTo>
-                    <a:pt x="1647318" y="443939"/>
-                  </a:lnTo>
-                  <a:lnTo>
-                    <a:pt x="1718940" y="460554"/>
-                  </a:lnTo>
-                  <a:lnTo>
-                    <a:pt x="1790563" y="476968"/>
-                  </a:lnTo>
-                  <a:lnTo>
-                    <a:pt x="1862185" y="493183"/>
-                  </a:lnTo>
-                  <a:lnTo>
-                    <a:pt x="1933808" y="509201"/>
-                  </a:lnTo>
-                  <a:lnTo>
-                    <a:pt x="2005430" y="525024"/>
-                  </a:lnTo>
-                  <a:lnTo>
-                    <a:pt x="2077053" y="540656"/>
-                  </a:lnTo>
-                  <a:lnTo>
-                    <a:pt x="2148675" y="556097"/>
-                  </a:lnTo>
-                  <a:lnTo>
-                    <a:pt x="2220298" y="571351"/>
-                  </a:lnTo>
-                  <a:lnTo>
-                    <a:pt x="2291920" y="586420"/>
-                  </a:lnTo>
-                  <a:lnTo>
-                    <a:pt x="2363543" y="601307"/>
-                  </a:lnTo>
-                  <a:lnTo>
-                    <a:pt x="2435165" y="616012"/>
-                  </a:lnTo>
-                  <a:lnTo>
-                    <a:pt x="2506788" y="630539"/>
-                  </a:lnTo>
-                  <a:lnTo>
-                    <a:pt x="2578410" y="644889"/>
-                  </a:lnTo>
-                  <a:lnTo>
-                    <a:pt x="2650033" y="659065"/>
-                  </a:lnTo>
-                  <a:lnTo>
-                    <a:pt x="2721655" y="673070"/>
-                  </a:lnTo>
-                  <a:lnTo>
-                    <a:pt x="2793278" y="686904"/>
-                  </a:lnTo>
-                  <a:lnTo>
-                    <a:pt x="2864901" y="700570"/>
-                  </a:lnTo>
-                  <a:lnTo>
-                    <a:pt x="2936523" y="714070"/>
-                  </a:lnTo>
-                  <a:lnTo>
-                    <a:pt x="3008146" y="727407"/>
-                  </a:lnTo>
-                  <a:lnTo>
-                    <a:pt x="3079768" y="740581"/>
-                  </a:lnTo>
-                  <a:lnTo>
-                    <a:pt x="3151391" y="753596"/>
-                  </a:lnTo>
-                  <a:lnTo>
-                    <a:pt x="3223013" y="766452"/>
-                  </a:lnTo>
-                  <a:lnTo>
-                    <a:pt x="3294636" y="779153"/>
-                  </a:lnTo>
-                  <a:lnTo>
-                    <a:pt x="3366258" y="791699"/>
-                  </a:lnTo>
-                  <a:lnTo>
-                    <a:pt x="3437881" y="804093"/>
-                  </a:lnTo>
-                  <a:lnTo>
-                    <a:pt x="3509503" y="816337"/>
-                  </a:lnTo>
-                  <a:lnTo>
-                    <a:pt x="3581126" y="828432"/>
-                  </a:lnTo>
-                  <a:lnTo>
-                    <a:pt x="3652748" y="840380"/>
-                  </a:lnTo>
-                  <a:lnTo>
-                    <a:pt x="3724371" y="852183"/>
-                  </a:lnTo>
-                  <a:lnTo>
-                    <a:pt x="3795993" y="863843"/>
-                  </a:lnTo>
-                  <a:lnTo>
-                    <a:pt x="3867616" y="875361"/>
-                  </a:lnTo>
-                  <a:lnTo>
-                    <a:pt x="3939238" y="886740"/>
-                  </a:lnTo>
-                  <a:lnTo>
-                    <a:pt x="4010861" y="897980"/>
-                  </a:lnTo>
-                  <a:lnTo>
-                    <a:pt x="4082483" y="909084"/>
-                  </a:lnTo>
-                  <a:lnTo>
-                    <a:pt x="4154106" y="920053"/>
-                  </a:lnTo>
-                  <a:lnTo>
-                    <a:pt x="4225729" y="930889"/>
-                  </a:lnTo>
-                  <a:lnTo>
-                    <a:pt x="4297351" y="941593"/>
-                  </a:lnTo>
-                  <a:lnTo>
-                    <a:pt x="4368974" y="952168"/>
-                  </a:lnTo>
-                  <a:lnTo>
-                    <a:pt x="4440596" y="962614"/>
-                  </a:lnTo>
-                  <a:lnTo>
-                    <a:pt x="4512219" y="972933"/>
-                  </a:lnTo>
-                  <a:lnTo>
-                    <a:pt x="4583841" y="983127"/>
-                  </a:lnTo>
-                  <a:lnTo>
-                    <a:pt x="4655464" y="993197"/>
-                  </a:lnTo>
-                  <a:lnTo>
-                    <a:pt x="4727086" y="1003145"/>
-                  </a:lnTo>
-                  <a:lnTo>
-                    <a:pt x="4798709" y="1012972"/>
-                  </a:lnTo>
-                  <a:lnTo>
-                    <a:pt x="4870331" y="1022680"/>
-                  </a:lnTo>
-                  <a:lnTo>
-                    <a:pt x="4941954" y="1032270"/>
-                  </a:lnTo>
-                  <a:lnTo>
-                    <a:pt x="5013576" y="1041744"/>
-                  </a:lnTo>
-                  <a:lnTo>
-                    <a:pt x="5085199" y="1051103"/>
-                  </a:lnTo>
-                  <a:lnTo>
-                    <a:pt x="5156821" y="1060348"/>
-                  </a:lnTo>
-                  <a:lnTo>
-                    <a:pt x="5228444" y="1069481"/>
-                  </a:lnTo>
-                  <a:lnTo>
-                    <a:pt x="5300066" y="1078503"/>
-                  </a:lnTo>
-                  <a:lnTo>
-                    <a:pt x="5371689" y="1087415"/>
-                  </a:lnTo>
-                  <a:lnTo>
-                    <a:pt x="5443311" y="1096219"/>
-                  </a:lnTo>
-                  <a:lnTo>
-                    <a:pt x="5514934" y="1104917"/>
-                  </a:lnTo>
-                  <a:lnTo>
-                    <a:pt x="5586557" y="1113508"/>
-                  </a:lnTo>
-                  <a:lnTo>
-                    <a:pt x="5658179" y="1121996"/>
-                  </a:lnTo>
-                  <a:lnTo>
-                    <a:pt x="5729802" y="1130380"/>
-                  </a:lnTo>
-                  <a:lnTo>
-                    <a:pt x="5801424" y="1138663"/>
-                  </a:lnTo>
-                  <a:lnTo>
-                    <a:pt x="5873047" y="1146845"/>
-                  </a:lnTo>
-                  <a:lnTo>
-                    <a:pt x="5944669" y="1154928"/>
-                  </a:lnTo>
-                  <a:lnTo>
-                    <a:pt x="6016292" y="1162912"/>
-                  </a:lnTo>
-                  <a:lnTo>
-                    <a:pt x="6087914" y="1170800"/>
-                  </a:lnTo>
-                  <a:lnTo>
-                    <a:pt x="6159537" y="1178592"/>
-                  </a:lnTo>
-                  <a:lnTo>
-                    <a:pt x="6231159" y="1186289"/>
-                  </a:lnTo>
-                  <a:lnTo>
-                    <a:pt x="6302782" y="1193893"/>
-                  </a:lnTo>
-                  <a:lnTo>
-                    <a:pt x="6374404" y="1201405"/>
-                  </a:lnTo>
-                  <a:lnTo>
-                    <a:pt x="6446027" y="1208825"/>
-                  </a:lnTo>
-                  <a:lnTo>
-                    <a:pt x="6517649" y="1216156"/>
-                  </a:lnTo>
-                  <a:lnTo>
-                    <a:pt x="6589272" y="1223397"/>
-                  </a:lnTo>
-                  <a:lnTo>
-                    <a:pt x="6660894" y="1230551"/>
-                  </a:lnTo>
-                  <a:lnTo>
-                    <a:pt x="6732517" y="1237617"/>
-                  </a:lnTo>
-                  <a:lnTo>
-                    <a:pt x="6804139" y="1244598"/>
-                  </a:lnTo>
-                  <a:lnTo>
-                    <a:pt x="6875762" y="1251494"/>
-                  </a:lnTo>
-                  <a:lnTo>
-                    <a:pt x="6947385" y="1258307"/>
-                  </a:lnTo>
-                  <a:lnTo>
-                    <a:pt x="7019007" y="1265036"/>
-                  </a:lnTo>
-                  <a:lnTo>
-                    <a:pt x="7090630" y="1271684"/>
+                    <a:pt x="71622" y="19173"/>
+                  </a:lnTo>
+                  <a:lnTo>
+                    <a:pt x="143245" y="38132"/>
+                  </a:lnTo>
+                  <a:lnTo>
+                    <a:pt x="214867" y="56877"/>
+                  </a:lnTo>
+                  <a:lnTo>
+                    <a:pt x="286490" y="75413"/>
+                  </a:lnTo>
+                  <a:lnTo>
+                    <a:pt x="358112" y="93740"/>
+                  </a:lnTo>
+                  <a:lnTo>
+                    <a:pt x="429735" y="111862"/>
+                  </a:lnTo>
+                  <a:lnTo>
+                    <a:pt x="501357" y="129780"/>
+                  </a:lnTo>
+                  <a:lnTo>
+                    <a:pt x="572980" y="147497"/>
+                  </a:lnTo>
+                  <a:lnTo>
+                    <a:pt x="644602" y="165016"/>
+                  </a:lnTo>
+                  <a:lnTo>
+                    <a:pt x="716225" y="182338"/>
+                  </a:lnTo>
+                  <a:lnTo>
+                    <a:pt x="787847" y="199466"/>
+                  </a:lnTo>
+                  <a:lnTo>
+                    <a:pt x="859470" y="216401"/>
+                  </a:lnTo>
+                  <a:lnTo>
+                    <a:pt x="931092" y="233146"/>
+                  </a:lnTo>
+                  <a:lnTo>
+                    <a:pt x="1002715" y="249704"/>
+                  </a:lnTo>
+                  <a:lnTo>
+                    <a:pt x="1074337" y="266075"/>
+                  </a:lnTo>
+                  <a:lnTo>
+                    <a:pt x="1145960" y="282263"/>
+                  </a:lnTo>
+                  <a:lnTo>
+                    <a:pt x="1217582" y="298270"/>
+                  </a:lnTo>
+                  <a:lnTo>
+                    <a:pt x="1289205" y="314096"/>
+                  </a:lnTo>
+                  <a:lnTo>
+                    <a:pt x="1360827" y="329746"/>
+                  </a:lnTo>
+                  <a:lnTo>
+                    <a:pt x="1432450" y="345219"/>
+                  </a:lnTo>
+                  <a:lnTo>
+                    <a:pt x="1504073" y="360519"/>
+                  </a:lnTo>
+                  <a:lnTo>
+                    <a:pt x="1575695" y="375647"/>
+                  </a:lnTo>
+                  <a:lnTo>
+                    <a:pt x="1647318" y="390606"/>
+                  </a:lnTo>
+                  <a:lnTo>
+                    <a:pt x="1718940" y="405396"/>
+                  </a:lnTo>
+                  <a:lnTo>
+                    <a:pt x="1790563" y="420021"/>
+                  </a:lnTo>
+                  <a:lnTo>
+                    <a:pt x="1862185" y="434482"/>
+                  </a:lnTo>
+                  <a:lnTo>
+                    <a:pt x="1933808" y="448780"/>
+                  </a:lnTo>
+                  <a:lnTo>
+                    <a:pt x="2005430" y="462918"/>
+                  </a:lnTo>
+                  <a:lnTo>
+                    <a:pt x="2077053" y="476897"/>
+                  </a:lnTo>
+                  <a:lnTo>
+                    <a:pt x="2148675" y="490719"/>
+                  </a:lnTo>
+                  <a:lnTo>
+                    <a:pt x="2220298" y="504387"/>
+                  </a:lnTo>
+                  <a:lnTo>
+                    <a:pt x="2291920" y="517901"/>
+                  </a:lnTo>
+                  <a:lnTo>
+                    <a:pt x="2363543" y="531263"/>
+                  </a:lnTo>
+                  <a:lnTo>
+                    <a:pt x="2435165" y="544475"/>
+                  </a:lnTo>
+                  <a:lnTo>
+                    <a:pt x="2506788" y="557539"/>
+                  </a:lnTo>
+                  <a:lnTo>
+                    <a:pt x="2578410" y="570457"/>
+                  </a:lnTo>
+                  <a:lnTo>
+                    <a:pt x="2650033" y="583229"/>
+                  </a:lnTo>
+                  <a:lnTo>
+                    <a:pt x="2721655" y="595859"/>
+                  </a:lnTo>
+                  <a:lnTo>
+                    <a:pt x="2793278" y="608346"/>
+                  </a:lnTo>
+                  <a:lnTo>
+                    <a:pt x="2864901" y="620693"/>
+                  </a:lnTo>
+                  <a:lnTo>
+                    <a:pt x="2936523" y="632902"/>
+                  </a:lnTo>
+                  <a:lnTo>
+                    <a:pt x="3008146" y="644974"/>
+                  </a:lnTo>
+                  <a:lnTo>
+                    <a:pt x="3079768" y="656910"/>
+                  </a:lnTo>
+                  <a:lnTo>
+                    <a:pt x="3151391" y="668713"/>
+                  </a:lnTo>
+                  <a:lnTo>
+                    <a:pt x="3223013" y="680383"/>
+                  </a:lnTo>
+                  <a:lnTo>
+                    <a:pt x="3294636" y="691922"/>
+                  </a:lnTo>
+                  <a:lnTo>
+                    <a:pt x="3366258" y="703332"/>
+                  </a:lnTo>
+                  <a:lnTo>
+                    <a:pt x="3437881" y="714613"/>
+                  </a:lnTo>
+                  <a:lnTo>
+                    <a:pt x="3509503" y="725768"/>
+                  </a:lnTo>
+                  <a:lnTo>
+                    <a:pt x="3581126" y="736798"/>
+                  </a:lnTo>
+                  <a:lnTo>
+                    <a:pt x="3652748" y="747704"/>
+                  </a:lnTo>
+                  <a:lnTo>
+                    <a:pt x="3724371" y="758488"/>
+                  </a:lnTo>
+                  <a:lnTo>
+                    <a:pt x="3795993" y="769150"/>
+                  </a:lnTo>
+                  <a:lnTo>
+                    <a:pt x="3867616" y="779693"/>
+                  </a:lnTo>
+                  <a:lnTo>
+                    <a:pt x="3939238" y="790118"/>
+                  </a:lnTo>
+                  <a:lnTo>
+                    <a:pt x="4010861" y="800426"/>
+                  </a:lnTo>
+                  <a:lnTo>
+                    <a:pt x="4082483" y="810618"/>
+                  </a:lnTo>
+                  <a:lnTo>
+                    <a:pt x="4154106" y="820696"/>
+                  </a:lnTo>
+                  <a:lnTo>
+                    <a:pt x="4225729" y="830660"/>
+                  </a:lnTo>
+                  <a:lnTo>
+                    <a:pt x="4297351" y="840513"/>
+                  </a:lnTo>
+                  <a:lnTo>
+                    <a:pt x="4368974" y="850255"/>
+                  </a:lnTo>
+                  <a:lnTo>
+                    <a:pt x="4440596" y="859888"/>
+                  </a:lnTo>
+                  <a:lnTo>
+                    <a:pt x="4512219" y="869413"/>
+                  </a:lnTo>
+                  <a:lnTo>
+                    <a:pt x="4583841" y="878831"/>
+                  </a:lnTo>
+                  <a:lnTo>
+                    <a:pt x="4655464" y="888143"/>
+                  </a:lnTo>
+                  <a:lnTo>
+                    <a:pt x="4727086" y="897351"/>
+                  </a:lnTo>
+                  <a:lnTo>
+                    <a:pt x="4798709" y="906456"/>
+                  </a:lnTo>
+                  <a:lnTo>
+                    <a:pt x="4870331" y="915458"/>
+                  </a:lnTo>
+                  <a:lnTo>
+                    <a:pt x="4941954" y="924359"/>
+                  </a:lnTo>
+                  <a:lnTo>
+                    <a:pt x="5013576" y="933161"/>
+                  </a:lnTo>
+                  <a:lnTo>
+                    <a:pt x="5085199" y="941863"/>
+                  </a:lnTo>
+                  <a:lnTo>
+                    <a:pt x="5156821" y="950468"/>
+                  </a:lnTo>
+                  <a:lnTo>
+                    <a:pt x="5228444" y="958977"/>
+                  </a:lnTo>
+                  <a:lnTo>
+                    <a:pt x="5300066" y="967390"/>
+                  </a:lnTo>
+                  <a:lnTo>
+                    <a:pt x="5371689" y="975708"/>
+                  </a:lnTo>
+                  <a:lnTo>
+                    <a:pt x="5443311" y="983934"/>
+                  </a:lnTo>
+                  <a:lnTo>
+                    <a:pt x="5514934" y="992067"/>
+                  </a:lnTo>
+                  <a:lnTo>
+                    <a:pt x="5586557" y="1000108"/>
+                  </a:lnTo>
+                  <a:lnTo>
+                    <a:pt x="5658179" y="1008060"/>
+                  </a:lnTo>
+                  <a:lnTo>
+                    <a:pt x="5729802" y="1015922"/>
+                  </a:lnTo>
+                  <a:lnTo>
+                    <a:pt x="5801424" y="1023696"/>
+                  </a:lnTo>
+                  <a:lnTo>
+                    <a:pt x="5873047" y="1031383"/>
+                  </a:lnTo>
+                  <a:lnTo>
+                    <a:pt x="5944669" y="1038983"/>
+                  </a:lnTo>
+                  <a:lnTo>
+                    <a:pt x="6016292" y="1046499"/>
+                  </a:lnTo>
+                  <a:lnTo>
+                    <a:pt x="6087914" y="1053929"/>
+                  </a:lnTo>
+                  <a:lnTo>
+                    <a:pt x="6159537" y="1061277"/>
+                  </a:lnTo>
+                  <a:lnTo>
+                    <a:pt x="6231159" y="1068542"/>
+                  </a:lnTo>
+                  <a:lnTo>
+                    <a:pt x="6302782" y="1075726"/>
+                  </a:lnTo>
+                  <a:lnTo>
+                    <a:pt x="6374404" y="1082829"/>
+                  </a:lnTo>
+                  <a:lnTo>
+                    <a:pt x="6446027" y="1089852"/>
+                  </a:lnTo>
+                  <a:lnTo>
+                    <a:pt x="6517649" y="1096796"/>
+                  </a:lnTo>
+                  <a:lnTo>
+                    <a:pt x="6589272" y="1103663"/>
+                  </a:lnTo>
+                  <a:lnTo>
+                    <a:pt x="6660894" y="1110452"/>
+                  </a:lnTo>
+                  <a:lnTo>
+                    <a:pt x="6732517" y="1117166"/>
+                  </a:lnTo>
+                  <a:lnTo>
+                    <a:pt x="6804139" y="1123804"/>
+                  </a:lnTo>
+                  <a:lnTo>
+                    <a:pt x="6875762" y="1130367"/>
+                  </a:lnTo>
+                  <a:lnTo>
+                    <a:pt x="6947385" y="1136857"/>
+                  </a:lnTo>
+                  <a:lnTo>
+                    <a:pt x="7019007" y="1143274"/>
+                  </a:lnTo>
+                  <a:lnTo>
+                    <a:pt x="7090630" y="1149619"/>
                   </a:lnTo>
                 </a:path>
               </a:pathLst>
@@ -4388,7 +4388,7 @@
           </p:nvSpPr>
           <p:spPr>
             <a:xfrm>
-              <a:off x="5756448" y="2073503"/>
+              <a:off x="5759271" y="2073503"/>
               <a:ext cx="0" cy="3649639"/>
             </a:xfrm>
             <a:custGeom>
@@ -4431,7 +4431,7 @@
           </p:nvSpPr>
           <p:spPr>
             <a:xfrm>
-              <a:off x="4469314" y="2073503"/>
+              <a:off x="4504692" y="2073503"/>
               <a:ext cx="0" cy="3649639"/>
             </a:xfrm>
             <a:custGeom>
@@ -4474,7 +4474,7 @@
           </p:nvSpPr>
           <p:spPr>
             <a:xfrm>
-              <a:off x="6872676" y="2073503"/>
+              <a:off x="6871070" y="2073503"/>
               <a:ext cx="0" cy="3649639"/>
             </a:xfrm>
             <a:custGeom>
@@ -4747,7 +4747,7 @@
           </p:nvSpPr>
           <p:spPr>
             <a:xfrm>
-              <a:off x="3199861" y="5785772"/>
+              <a:off x="3201825" y="5785772"/>
               <a:ext cx="161574" cy="80101"/>
             </a:xfrm>
             <a:prstGeom prst="rect">
@@ -4793,7 +4793,7 @@
           </p:nvSpPr>
           <p:spPr>
             <a:xfrm>
-              <a:off x="5730225" y="5785772"/>
+              <a:off x="5727471" y="5785772"/>
               <a:ext cx="62179" cy="80101"/>
             </a:xfrm>
             <a:prstGeom prst="rect">
@@ -4839,7 +4839,7 @@
           </p:nvSpPr>
           <p:spPr>
             <a:xfrm>
-              <a:off x="8179802" y="5785772"/>
+              <a:off x="8172329" y="5785772"/>
               <a:ext cx="124358" cy="80101"/>
             </a:xfrm>
             <a:prstGeom prst="rect">
@@ -5010,7 +5010,7 @@
                   <a:latin typeface="Helvetica"/>
                   <a:cs typeface="Helvetica"/>
                 </a:rPr>
-                <a:t>subHR per 10 mL/min decline: 1.18 (0.76-1.85), p_Bonf = 1.000 (n = 6)  |  per IQR decline (Δ = 24.2): 1.51 (0.51-4.46)  |  IQR: [-13.0, 11.2]</a:t>
+                <a:t>subHR per 10 mL/min decline: 1.17 (0.74-1.84), p_Bonf = 1.000 (n = 6)  |  per IQR decline (Δ = 23.9): 1.45 (0.49-4.27)  |  IQR: [-12.7, 11.2]</a:t>
               </a:r>
             </a:p>
           </p:txBody>
